--- a/Final-Group-Presentation/group_final_presentation.pptx
+++ b/Final-Group-Presentation/group_final_presentation.pptx
@@ -5,7 +5,7 @@
     <p:sldMasterId id="2147483648" r:id="rId1"/>
   </p:sldMasterIdLst>
   <p:notesMasterIdLst>
-    <p:notesMasterId r:id="rId16"/>
+    <p:notesMasterId r:id="rId17"/>
   </p:notesMasterIdLst>
   <p:sldIdLst>
     <p:sldId id="256" r:id="rId2"/>
@@ -14,14 +14,15 @@
     <p:sldId id="260" r:id="rId5"/>
     <p:sldId id="259" r:id="rId6"/>
     <p:sldId id="261" r:id="rId7"/>
-    <p:sldId id="269" r:id="rId8"/>
-    <p:sldId id="270" r:id="rId9"/>
-    <p:sldId id="263" r:id="rId10"/>
-    <p:sldId id="272" r:id="rId11"/>
-    <p:sldId id="265" r:id="rId12"/>
-    <p:sldId id="273" r:id="rId13"/>
-    <p:sldId id="264" r:id="rId14"/>
-    <p:sldId id="274" r:id="rId15"/>
+    <p:sldId id="275" r:id="rId8"/>
+    <p:sldId id="269" r:id="rId9"/>
+    <p:sldId id="270" r:id="rId10"/>
+    <p:sldId id="263" r:id="rId11"/>
+    <p:sldId id="272" r:id="rId12"/>
+    <p:sldId id="265" r:id="rId13"/>
+    <p:sldId id="273" r:id="rId14"/>
+    <p:sldId id="264" r:id="rId15"/>
+    <p:sldId id="274" r:id="rId16"/>
   </p:sldIdLst>
   <p:sldSz cx="12192000" cy="6858000"/>
   <p:notesSz cx="6858000" cy="12192000"/>
@@ -367,6 +368,90 @@
   <p:cSld>
     <p:spTree>
       <p:nvGrpSpPr>
+        <p:cNvPr id="1" name=""/>
+        <p:cNvGrpSpPr/>
+        <p:nvPr/>
+      </p:nvGrpSpPr>
+      <p:grpSpPr>
+        <a:xfrm>
+          <a:off x="0" y="0"/>
+          <a:ext cx="0" cy="0"/>
+          <a:chOff x="0" y="0"/>
+          <a:chExt cx="0" cy="0"/>
+        </a:xfrm>
+      </p:grpSpPr>
+      <p:sp>
+        <p:nvSpPr>
+          <p:cNvPr id="2" name="Slide Image Placeholder 1"/>
+          <p:cNvSpPr>
+            <a:spLocks noGrp="1" noRot="1" noChangeAspect="1"/>
+          </p:cNvSpPr>
+          <p:nvPr>
+            <p:ph type="sldImg"/>
+          </p:nvPr>
+        </p:nvSpPr>
+        <p:spPr/>
+      </p:sp>
+      <p:sp>
+        <p:nvSpPr>
+          <p:cNvPr id="3" name="Notes Placeholder 2"/>
+          <p:cNvSpPr>
+            <a:spLocks noGrp="1"/>
+          </p:cNvSpPr>
+          <p:nvPr>
+            <p:ph type="body" idx="1"/>
+          </p:nvPr>
+        </p:nvSpPr>
+        <p:spPr/>
+        <p:txBody>
+          <a:bodyPr/>
+          <a:lstStyle/>
+          <a:p>
+            <a:endParaRPr lang="en-US" dirty="0"/>
+          </a:p>
+        </p:txBody>
+      </p:sp>
+      <p:sp>
+        <p:nvSpPr>
+          <p:cNvPr id="4" name="Slide Number Placeholder 3"/>
+          <p:cNvSpPr>
+            <a:spLocks noGrp="1"/>
+          </p:cNvSpPr>
+          <p:nvPr>
+            <p:ph type="sldNum" sz="quarter" idx="10"/>
+          </p:nvPr>
+        </p:nvSpPr>
+        <p:spPr/>
+        <p:txBody>
+          <a:bodyPr/>
+          <a:lstStyle/>
+          <a:p>
+            <a:fld id="{F7021451-1387-4CA6-816F-3879F97B5CBC}" type="slidenum">
+              <a:rPr lang="en-US"/>
+              <a:t>10</a:t>
+            </a:fld>
+            <a:endParaRPr lang="en-US" dirty="0"/>
+          </a:p>
+        </p:txBody>
+      </p:sp>
+    </p:spTree>
+    <p:extLst>
+      <p:ext uri="{BB962C8B-B14F-4D97-AF65-F5344CB8AC3E}">
+        <p14:creationId xmlns:p14="http://schemas.microsoft.com/office/powerpoint/2010/main" val="1024086991"/>
+      </p:ext>
+    </p:extLst>
+  </p:cSld>
+  <p:clrMapOvr>
+    <a:masterClrMapping/>
+  </p:clrMapOvr>
+</p:notes>
+</file>
+
+<file path=ppt/notesSlides/notesSlide11.xml><?xml version="1.0" encoding="utf-8"?>
+<p:notes xmlns:a="http://schemas.openxmlformats.org/drawingml/2006/main" xmlns:r="http://schemas.openxmlformats.org/officeDocument/2006/relationships" xmlns:p="http://schemas.openxmlformats.org/presentationml/2006/main">
+  <p:cSld>
+    <p:spTree>
+      <p:nvGrpSpPr>
         <p:cNvPr id="1" name="">
           <a:extLst>
             <a:ext uri="{FF2B5EF4-FFF2-40B4-BE49-F238E27FC236}">
@@ -451,7 +536,7 @@
           <a:p>
             <a:fld id="{F7021451-1387-4CA6-816F-3879F97B5CBC}" type="slidenum">
               <a:rPr lang="en-US"/>
-              <a:t>10</a:t>
+              <a:t>11</a:t>
             </a:fld>
             <a:endParaRPr lang="en-US" dirty="0"/>
           </a:p>
@@ -470,7 +555,7 @@
 </p:notes>
 </file>
 
-<file path=ppt/notesSlides/notesSlide11.xml><?xml version="1.0" encoding="utf-8"?>
+<file path=ppt/notesSlides/notesSlide12.xml><?xml version="1.0" encoding="utf-8"?>
 <p:notes xmlns:a="http://schemas.openxmlformats.org/drawingml/2006/main" xmlns:r="http://schemas.openxmlformats.org/officeDocument/2006/relationships" xmlns:p="http://schemas.openxmlformats.org/presentationml/2006/main">
   <p:cSld>
     <p:spTree>
@@ -559,7 +644,7 @@
           <a:p>
             <a:fld id="{F7021451-1387-4CA6-816F-3879F97B5CBC}" type="slidenum">
               <a:rPr lang="en-US"/>
-              <a:t>11</a:t>
+              <a:t>12</a:t>
             </a:fld>
             <a:endParaRPr lang="en-US" dirty="0"/>
           </a:p>
@@ -578,7 +663,7 @@
 </p:notes>
 </file>
 
-<file path=ppt/notesSlides/notesSlide12.xml><?xml version="1.0" encoding="utf-8"?>
+<file path=ppt/notesSlides/notesSlide13.xml><?xml version="1.0" encoding="utf-8"?>
 <p:notes xmlns:a="http://schemas.openxmlformats.org/drawingml/2006/main" xmlns:r="http://schemas.openxmlformats.org/officeDocument/2006/relationships" xmlns:p="http://schemas.openxmlformats.org/presentationml/2006/main">
   <p:cSld>
     <p:spTree>
@@ -667,7 +752,7 @@
           <a:p>
             <a:fld id="{F7021451-1387-4CA6-816F-3879F97B5CBC}" type="slidenum">
               <a:rPr lang="en-US"/>
-              <a:t>12</a:t>
+              <a:t>13</a:t>
             </a:fld>
             <a:endParaRPr lang="en-US" dirty="0"/>
           </a:p>
@@ -686,7 +771,7 @@
 </p:notes>
 </file>
 
-<file path=ppt/notesSlides/notesSlide13.xml><?xml version="1.0" encoding="utf-8"?>
+<file path=ppt/notesSlides/notesSlide14.xml><?xml version="1.0" encoding="utf-8"?>
 <p:notes xmlns:a="http://schemas.openxmlformats.org/drawingml/2006/main" xmlns:r="http://schemas.openxmlformats.org/officeDocument/2006/relationships" xmlns:p="http://schemas.openxmlformats.org/presentationml/2006/main">
   <p:cSld>
     <p:spTree>
@@ -751,7 +836,7 @@
           <a:p>
             <a:fld id="{F7021451-1387-4CA6-816F-3879F97B5CBC}" type="slidenum">
               <a:rPr lang="en-US"/>
-              <a:t>13</a:t>
+              <a:t>14</a:t>
             </a:fld>
             <a:endParaRPr lang="en-US" dirty="0"/>
           </a:p>
@@ -770,7 +855,7 @@
 </p:notes>
 </file>
 
-<file path=ppt/notesSlides/notesSlide14.xml><?xml version="1.0" encoding="utf-8"?>
+<file path=ppt/notesSlides/notesSlide15.xml><?xml version="1.0" encoding="utf-8"?>
 <p:notes xmlns:a="http://schemas.openxmlformats.org/drawingml/2006/main" xmlns:r="http://schemas.openxmlformats.org/officeDocument/2006/relationships" xmlns:p="http://schemas.openxmlformats.org/presentationml/2006/main">
   <p:cSld>
     <p:spTree>
@@ -859,7 +944,7 @@
           <a:p>
             <a:fld id="{F7021451-1387-4CA6-816F-3879F97B5CBC}" type="slidenum">
               <a:rPr lang="en-US"/>
-              <a:t>14</a:t>
+              <a:t>15</a:t>
             </a:fld>
             <a:endParaRPr lang="en-US" dirty="0"/>
           </a:p>
@@ -1306,6 +1391,114 @@
         <p:cNvPr id="1" name="">
           <a:extLst>
             <a:ext uri="{FF2B5EF4-FFF2-40B4-BE49-F238E27FC236}">
+              <a16:creationId xmlns:a16="http://schemas.microsoft.com/office/drawing/2014/main" id="{FBB690CE-60AB-FEDC-21C8-BAF6B9BDF12F}"/>
+            </a:ext>
+          </a:extLst>
+        </p:cNvPr>
+        <p:cNvGrpSpPr/>
+        <p:nvPr/>
+      </p:nvGrpSpPr>
+      <p:grpSpPr>
+        <a:xfrm>
+          <a:off x="0" y="0"/>
+          <a:ext cx="0" cy="0"/>
+          <a:chOff x="0" y="0"/>
+          <a:chExt cx="0" cy="0"/>
+        </a:xfrm>
+      </p:grpSpPr>
+      <p:sp>
+        <p:nvSpPr>
+          <p:cNvPr id="2" name="Slide Image Placeholder 1">
+            <a:extLst>
+              <a:ext uri="{FF2B5EF4-FFF2-40B4-BE49-F238E27FC236}">
+                <a16:creationId xmlns:a16="http://schemas.microsoft.com/office/drawing/2014/main" id="{E9A5B1DB-7840-1CE5-81F9-6685C2499615}"/>
+              </a:ext>
+            </a:extLst>
+          </p:cNvPr>
+          <p:cNvSpPr>
+            <a:spLocks noGrp="1" noRot="1" noChangeAspect="1"/>
+          </p:cNvSpPr>
+          <p:nvPr>
+            <p:ph type="sldImg"/>
+          </p:nvPr>
+        </p:nvSpPr>
+        <p:spPr/>
+      </p:sp>
+      <p:sp>
+        <p:nvSpPr>
+          <p:cNvPr id="3" name="Notes Placeholder 2">
+            <a:extLst>
+              <a:ext uri="{FF2B5EF4-FFF2-40B4-BE49-F238E27FC236}">
+                <a16:creationId xmlns:a16="http://schemas.microsoft.com/office/drawing/2014/main" id="{75AE2AB4-9BA8-3A72-4414-BA3813B4570A}"/>
+              </a:ext>
+            </a:extLst>
+          </p:cNvPr>
+          <p:cNvSpPr>
+            <a:spLocks noGrp="1"/>
+          </p:cNvSpPr>
+          <p:nvPr>
+            <p:ph type="body" idx="1"/>
+          </p:nvPr>
+        </p:nvSpPr>
+        <p:spPr/>
+        <p:txBody>
+          <a:bodyPr/>
+          <a:lstStyle/>
+          <a:p>
+            <a:endParaRPr lang="en-US" dirty="0"/>
+          </a:p>
+        </p:txBody>
+      </p:sp>
+      <p:sp>
+        <p:nvSpPr>
+          <p:cNvPr id="4" name="Slide Number Placeholder 3">
+            <a:extLst>
+              <a:ext uri="{FF2B5EF4-FFF2-40B4-BE49-F238E27FC236}">
+                <a16:creationId xmlns:a16="http://schemas.microsoft.com/office/drawing/2014/main" id="{F1AA8C52-1C4E-6ED2-E126-B783AB463506}"/>
+              </a:ext>
+            </a:extLst>
+          </p:cNvPr>
+          <p:cNvSpPr>
+            <a:spLocks noGrp="1"/>
+          </p:cNvSpPr>
+          <p:nvPr>
+            <p:ph type="sldNum" sz="quarter" idx="10"/>
+          </p:nvPr>
+        </p:nvSpPr>
+        <p:spPr/>
+        <p:txBody>
+          <a:bodyPr/>
+          <a:lstStyle/>
+          <a:p>
+            <a:fld id="{F7021451-1387-4CA6-816F-3879F97B5CBC}" type="slidenum">
+              <a:rPr lang="en-US"/>
+              <a:t>7</a:t>
+            </a:fld>
+            <a:endParaRPr lang="en-US" dirty="0"/>
+          </a:p>
+        </p:txBody>
+      </p:sp>
+    </p:spTree>
+    <p:extLst>
+      <p:ext uri="{BB962C8B-B14F-4D97-AF65-F5344CB8AC3E}">
+        <p14:creationId xmlns:p14="http://schemas.microsoft.com/office/powerpoint/2010/main" val="4183618758"/>
+      </p:ext>
+    </p:extLst>
+  </p:cSld>
+  <p:clrMapOvr>
+    <a:masterClrMapping/>
+  </p:clrMapOvr>
+</p:notes>
+</file>
+
+<file path=ppt/notesSlides/notesSlide8.xml><?xml version="1.0" encoding="utf-8"?>
+<p:notes xmlns:a="http://schemas.openxmlformats.org/drawingml/2006/main" xmlns:r="http://schemas.openxmlformats.org/officeDocument/2006/relationships" xmlns:p="http://schemas.openxmlformats.org/presentationml/2006/main">
+  <p:cSld>
+    <p:spTree>
+      <p:nvGrpSpPr>
+        <p:cNvPr id="1" name="">
+          <a:extLst>
+            <a:ext uri="{FF2B5EF4-FFF2-40B4-BE49-F238E27FC236}">
               <a16:creationId xmlns:a16="http://schemas.microsoft.com/office/drawing/2014/main" id="{CA8D715A-81A2-B9EA-5275-F3BFD9F6A072}"/>
             </a:ext>
           </a:extLst>
@@ -1387,7 +1580,7 @@
           <a:p>
             <a:fld id="{F7021451-1387-4CA6-816F-3879F97B5CBC}" type="slidenum">
               <a:rPr lang="en-US"/>
-              <a:t>7</a:t>
+              <a:t>8</a:t>
             </a:fld>
             <a:endParaRPr lang="en-US" dirty="0"/>
           </a:p>
@@ -1406,7 +1599,7 @@
 </p:notes>
 </file>
 
-<file path=ppt/notesSlides/notesSlide8.xml><?xml version="1.0" encoding="utf-8"?>
+<file path=ppt/notesSlides/notesSlide9.xml><?xml version="1.0" encoding="utf-8"?>
 <p:notes xmlns:a="http://schemas.openxmlformats.org/drawingml/2006/main" xmlns:r="http://schemas.openxmlformats.org/officeDocument/2006/relationships" xmlns:p="http://schemas.openxmlformats.org/presentationml/2006/main">
   <p:cSld>
     <p:spTree>
@@ -1495,7 +1688,7 @@
           <a:p>
             <a:fld id="{F7021451-1387-4CA6-816F-3879F97B5CBC}" type="slidenum">
               <a:rPr lang="en-US"/>
-              <a:t>8</a:t>
+              <a:t>9</a:t>
             </a:fld>
             <a:endParaRPr lang="en-US" dirty="0"/>
           </a:p>
@@ -1505,90 +1698,6 @@
     <p:extLst>
       <p:ext uri="{BB962C8B-B14F-4D97-AF65-F5344CB8AC3E}">
         <p14:creationId xmlns:p14="http://schemas.microsoft.com/office/powerpoint/2010/main" val="488129237"/>
-      </p:ext>
-    </p:extLst>
-  </p:cSld>
-  <p:clrMapOvr>
-    <a:masterClrMapping/>
-  </p:clrMapOvr>
-</p:notes>
-</file>
-
-<file path=ppt/notesSlides/notesSlide9.xml><?xml version="1.0" encoding="utf-8"?>
-<p:notes xmlns:a="http://schemas.openxmlformats.org/drawingml/2006/main" xmlns:r="http://schemas.openxmlformats.org/officeDocument/2006/relationships" xmlns:p="http://schemas.openxmlformats.org/presentationml/2006/main">
-  <p:cSld>
-    <p:spTree>
-      <p:nvGrpSpPr>
-        <p:cNvPr id="1" name=""/>
-        <p:cNvGrpSpPr/>
-        <p:nvPr/>
-      </p:nvGrpSpPr>
-      <p:grpSpPr>
-        <a:xfrm>
-          <a:off x="0" y="0"/>
-          <a:ext cx="0" cy="0"/>
-          <a:chOff x="0" y="0"/>
-          <a:chExt cx="0" cy="0"/>
-        </a:xfrm>
-      </p:grpSpPr>
-      <p:sp>
-        <p:nvSpPr>
-          <p:cNvPr id="2" name="Slide Image Placeholder 1"/>
-          <p:cNvSpPr>
-            <a:spLocks noGrp="1" noRot="1" noChangeAspect="1"/>
-          </p:cNvSpPr>
-          <p:nvPr>
-            <p:ph type="sldImg"/>
-          </p:nvPr>
-        </p:nvSpPr>
-        <p:spPr/>
-      </p:sp>
-      <p:sp>
-        <p:nvSpPr>
-          <p:cNvPr id="3" name="Notes Placeholder 2"/>
-          <p:cNvSpPr>
-            <a:spLocks noGrp="1"/>
-          </p:cNvSpPr>
-          <p:nvPr>
-            <p:ph type="body" idx="1"/>
-          </p:nvPr>
-        </p:nvSpPr>
-        <p:spPr/>
-        <p:txBody>
-          <a:bodyPr/>
-          <a:lstStyle/>
-          <a:p>
-            <a:endParaRPr lang="en-US" dirty="0"/>
-          </a:p>
-        </p:txBody>
-      </p:sp>
-      <p:sp>
-        <p:nvSpPr>
-          <p:cNvPr id="4" name="Slide Number Placeholder 3"/>
-          <p:cNvSpPr>
-            <a:spLocks noGrp="1"/>
-          </p:cNvSpPr>
-          <p:nvPr>
-            <p:ph type="sldNum" sz="quarter" idx="10"/>
-          </p:nvPr>
-        </p:nvSpPr>
-        <p:spPr/>
-        <p:txBody>
-          <a:bodyPr/>
-          <a:lstStyle/>
-          <a:p>
-            <a:fld id="{F7021451-1387-4CA6-816F-3879F97B5CBC}" type="slidenum">
-              <a:rPr lang="en-US"/>
-              <a:t>9</a:t>
-            </a:fld>
-            <a:endParaRPr lang="en-US" dirty="0"/>
-          </a:p>
-        </p:txBody>
-      </p:sp>
-    </p:spTree>
-    <p:extLst>
-      <p:ext uri="{BB962C8B-B14F-4D97-AF65-F5344CB8AC3E}">
-        <p14:creationId xmlns:p14="http://schemas.microsoft.com/office/powerpoint/2010/main" val="1024086991"/>
       </p:ext>
     </p:extLst>
   </p:cSld>
@@ -2567,6 +2676,765 @@
 
 <file path=ppt/slides/slide10.xml><?xml version="1.0" encoding="utf-8"?>
 <p:sld xmlns:a="http://schemas.openxmlformats.org/drawingml/2006/main" xmlns:r="http://schemas.openxmlformats.org/officeDocument/2006/relationships" xmlns:p="http://schemas.openxmlformats.org/presentationml/2006/main">
+  <p:cSld name="Slide 8">
+    <p:bg>
+      <p:bgPr>
+        <a:solidFill>
+          <a:srgbClr val="FAFBF8"/>
+        </a:solidFill>
+        <a:effectLst/>
+      </p:bgPr>
+    </p:bg>
+    <p:spTree>
+      <p:nvGrpSpPr>
+        <p:cNvPr id="1" name=""/>
+        <p:cNvGrpSpPr/>
+        <p:nvPr/>
+      </p:nvGrpSpPr>
+      <p:grpSpPr>
+        <a:xfrm>
+          <a:off x="0" y="0"/>
+          <a:ext cx="0" cy="0"/>
+          <a:chOff x="0" y="0"/>
+          <a:chExt cx="0" cy="0"/>
+        </a:xfrm>
+      </p:grpSpPr>
+      <p:sp>
+        <p:nvSpPr>
+          <p:cNvPr id="2" name="Shape 0"/>
+          <p:cNvSpPr/>
+          <p:nvPr/>
+        </p:nvSpPr>
+        <p:spPr>
+          <a:xfrm>
+            <a:off x="0" y="0"/>
+            <a:ext cx="12191695" cy="6858000"/>
+          </a:xfrm>
+          <a:prstGeom prst="rect">
+            <a:avLst/>
+          </a:prstGeom>
+          <a:solidFill>
+            <a:srgbClr val="FAFBF8"/>
+          </a:solidFill>
+          <a:ln w="12700">
+            <a:solidFill>
+              <a:srgbClr val="FAFBF8">
+                <a:alpha val="0"/>
+              </a:srgbClr>
+            </a:solidFill>
+            <a:prstDash val="solid"/>
+          </a:ln>
+        </p:spPr>
+        <p:txBody>
+          <a:bodyPr/>
+          <a:lstStyle/>
+          <a:p>
+            <a:endParaRPr lang="en-KR">
+              <a:highlight>
+                <a:srgbClr val="FFFF00"/>
+              </a:highlight>
+            </a:endParaRPr>
+          </a:p>
+        </p:txBody>
+      </p:sp>
+      <p:sp>
+        <p:nvSpPr>
+          <p:cNvPr id="3" name="Shape 1"/>
+          <p:cNvSpPr/>
+          <p:nvPr/>
+        </p:nvSpPr>
+        <p:spPr>
+          <a:xfrm>
+            <a:off x="0" y="0"/>
+            <a:ext cx="164592" cy="6858000"/>
+          </a:xfrm>
+          <a:prstGeom prst="rect">
+            <a:avLst/>
+          </a:prstGeom>
+          <a:solidFill>
+            <a:srgbClr val="6DBB2A"/>
+          </a:solidFill>
+          <a:ln w="12700">
+            <a:solidFill>
+              <a:srgbClr val="6DBB2A">
+                <a:alpha val="0"/>
+              </a:srgbClr>
+            </a:solidFill>
+            <a:prstDash val="solid"/>
+          </a:ln>
+        </p:spPr>
+        <p:txBody>
+          <a:bodyPr/>
+          <a:lstStyle/>
+          <a:p>
+            <a:endParaRPr lang="en-KR"/>
+          </a:p>
+        </p:txBody>
+      </p:sp>
+      <p:sp>
+        <p:nvSpPr>
+          <p:cNvPr id="4" name="Text 2"/>
+          <p:cNvSpPr/>
+          <p:nvPr/>
+        </p:nvSpPr>
+        <p:spPr>
+          <a:xfrm>
+            <a:off x="640080" y="438912"/>
+            <a:ext cx="10607040" cy="502920"/>
+          </a:xfrm>
+          <a:prstGeom prst="rect">
+            <a:avLst/>
+          </a:prstGeom>
+          <a:noFill/>
+          <a:ln/>
+        </p:spPr>
+        <p:txBody>
+          <a:bodyPr wrap="square" lIns="0" tIns="0" rIns="0" bIns="0" rtlCol="0" anchor="ctr">
+            <a:normAutofit/>
+          </a:bodyPr>
+          <a:lstStyle/>
+          <a:p>
+            <a:r>
+              <a:rPr lang="en-US" sz="2800" b="1" dirty="0"/>
+              <a:t>Pair F Observation: Throughput–Latency Trade-off</a:t>
+            </a:r>
+            <a:endParaRPr lang="en-US" sz="2800" dirty="0"/>
+          </a:p>
+        </p:txBody>
+      </p:sp>
+      <p:sp>
+        <p:nvSpPr>
+          <p:cNvPr id="5" name="Text 3"/>
+          <p:cNvSpPr/>
+          <p:nvPr/>
+        </p:nvSpPr>
+        <p:spPr>
+          <a:xfrm>
+            <a:off x="658368" y="973008"/>
+            <a:ext cx="9509760" cy="332147"/>
+          </a:xfrm>
+          <a:prstGeom prst="rect">
+            <a:avLst/>
+          </a:prstGeom>
+          <a:noFill/>
+          <a:ln/>
+        </p:spPr>
+        <p:txBody>
+          <a:bodyPr wrap="square" lIns="0" tIns="0" rIns="0" bIns="0" rtlCol="0" anchor="ctr"/>
+          <a:lstStyle/>
+          <a:p>
+            <a:r>
+              <a:rPr lang="en-US" sz="1250" dirty="0">
+                <a:solidFill>
+                  <a:srgbClr val="5F6673"/>
+                </a:solidFill>
+                <a:latin typeface="Aptos" pitchFamily="34" charset="0"/>
+              </a:rPr>
+              <a:t>Best speculative settings can improve throughput but increase TTFT</a:t>
+            </a:r>
+          </a:p>
+        </p:txBody>
+      </p:sp>
+      <p:sp>
+        <p:nvSpPr>
+          <p:cNvPr id="6" name="Shape 4"/>
+          <p:cNvSpPr/>
+          <p:nvPr/>
+        </p:nvSpPr>
+        <p:spPr>
+          <a:xfrm>
+            <a:off x="640080" y="1389888"/>
+            <a:ext cx="10881360" cy="0"/>
+          </a:xfrm>
+          <a:prstGeom prst="line">
+            <a:avLst/>
+          </a:prstGeom>
+          <a:noFill/>
+          <a:ln w="15240">
+            <a:solidFill>
+              <a:srgbClr val="D9E5D0"/>
+            </a:solidFill>
+            <a:prstDash val="solid"/>
+          </a:ln>
+        </p:spPr>
+        <p:txBody>
+          <a:bodyPr/>
+          <a:lstStyle/>
+          <a:p>
+            <a:endParaRPr lang="en-KR"/>
+          </a:p>
+        </p:txBody>
+      </p:sp>
+      <p:sp>
+        <p:nvSpPr>
+          <p:cNvPr id="7" name="Text 5"/>
+          <p:cNvSpPr/>
+          <p:nvPr/>
+        </p:nvSpPr>
+        <p:spPr>
+          <a:xfrm>
+            <a:off x="640080" y="6455664"/>
+            <a:ext cx="3474720" cy="201168"/>
+          </a:xfrm>
+          <a:prstGeom prst="rect">
+            <a:avLst/>
+          </a:prstGeom>
+          <a:noFill/>
+          <a:ln/>
+        </p:spPr>
+        <p:txBody>
+          <a:bodyPr wrap="square" lIns="0" tIns="0" rIns="0" bIns="0" rtlCol="0" anchor="ctr"/>
+          <a:lstStyle/>
+          <a:p>
+            <a:pPr marL="0" indent="0">
+              <a:buNone/>
+            </a:pPr>
+            <a:r>
+              <a:rPr lang="en-US" sz="850" dirty="0">
+                <a:solidFill>
+                  <a:srgbClr val="5F6673"/>
+                </a:solidFill>
+                <a:latin typeface="Aptos" pitchFamily="34" charset="0"/>
+                <a:ea typeface="Aptos" pitchFamily="34" charset="-122"/>
+                <a:cs typeface="Aptos" pitchFamily="34" charset="-120"/>
+              </a:rPr>
+              <a:t>Speculative Decoding Project  |  10</a:t>
+            </a:r>
+            <a:endParaRPr lang="en-US" sz="850" dirty="0"/>
+          </a:p>
+        </p:txBody>
+      </p:sp>
+      <p:pic>
+        <p:nvPicPr>
+          <p:cNvPr id="16" name="Image 0">
+            <a:extLst>
+              <a:ext uri="{FF2B5EF4-FFF2-40B4-BE49-F238E27FC236}">
+                <a16:creationId xmlns:a16="http://schemas.microsoft.com/office/drawing/2014/main" id="{127AF43F-9B8D-2055-F9D1-B46D4CBF24DA}"/>
+              </a:ext>
+            </a:extLst>
+          </p:cNvPr>
+          <p:cNvPicPr>
+            <a:picLocks noChangeAspect="1"/>
+          </p:cNvPicPr>
+          <p:nvPr/>
+        </p:nvPicPr>
+        <p:blipFill>
+          <a:blip r:embed="rId3"/>
+          <a:srcRect t="8191"/>
+          <a:stretch>
+            <a:fillRect/>
+          </a:stretch>
+        </p:blipFill>
+        <p:spPr>
+          <a:xfrm>
+            <a:off x="5449824" y="3337567"/>
+            <a:ext cx="5920285" cy="3118474"/>
+          </a:xfrm>
+          <a:prstGeom prst="rect">
+            <a:avLst/>
+          </a:prstGeom>
+        </p:spPr>
+      </p:pic>
+      <p:sp>
+        <p:nvSpPr>
+          <p:cNvPr id="19" name="TextBox 18">
+            <a:extLst>
+              <a:ext uri="{FF2B5EF4-FFF2-40B4-BE49-F238E27FC236}">
+                <a16:creationId xmlns:a16="http://schemas.microsoft.com/office/drawing/2014/main" id="{7844B5FA-FCEC-99B9-C4C7-C03EC80BC26A}"/>
+              </a:ext>
+            </a:extLst>
+          </p:cNvPr>
+          <p:cNvSpPr txBox="1"/>
+          <p:nvPr/>
+        </p:nvSpPr>
+        <p:spPr>
+          <a:xfrm>
+            <a:off x="7997928" y="1922493"/>
+            <a:ext cx="1224794" cy="338554"/>
+          </a:xfrm>
+          <a:prstGeom prst="rect">
+            <a:avLst/>
+          </a:prstGeom>
+          <a:noFill/>
+        </p:spPr>
+        <p:txBody>
+          <a:bodyPr wrap="square">
+            <a:spAutoFit/>
+          </a:bodyPr>
+          <a:lstStyle/>
+          <a:p>
+            <a:pPr marL="0" indent="0">
+              <a:buNone/>
+            </a:pPr>
+            <a:r>
+              <a:rPr lang="en-US" sz="1600" b="1" dirty="0">
+                <a:solidFill>
+                  <a:srgbClr val="2E7D32"/>
+                </a:solidFill>
+              </a:rPr>
+              <a:t>Takeaway</a:t>
+            </a:r>
+            <a:endParaRPr lang="en-US" sz="1600" dirty="0"/>
+          </a:p>
+        </p:txBody>
+      </p:sp>
+      <p:sp>
+        <p:nvSpPr>
+          <p:cNvPr id="20" name="TextBox 19">
+            <a:extLst>
+              <a:ext uri="{FF2B5EF4-FFF2-40B4-BE49-F238E27FC236}">
+                <a16:creationId xmlns:a16="http://schemas.microsoft.com/office/drawing/2014/main" id="{43CCDA49-B2E1-EBD4-22CD-8440151F7F2E}"/>
+              </a:ext>
+            </a:extLst>
+          </p:cNvPr>
+          <p:cNvSpPr txBox="1"/>
+          <p:nvPr/>
+        </p:nvSpPr>
+        <p:spPr>
+          <a:xfrm>
+            <a:off x="7997928" y="2219232"/>
+            <a:ext cx="3624178" cy="615553"/>
+          </a:xfrm>
+          <a:prstGeom prst="rect">
+            <a:avLst/>
+          </a:prstGeom>
+          <a:noFill/>
+        </p:spPr>
+        <p:txBody>
+          <a:bodyPr wrap="square">
+            <a:spAutoFit/>
+          </a:bodyPr>
+          <a:lstStyle/>
+          <a:p>
+            <a:r>
+              <a:rPr lang="en-US" sz="1200" b="1" dirty="0">
+                <a:solidFill>
+                  <a:srgbClr val="6DBB2A"/>
+                </a:solidFill>
+                <a:latin typeface="Aptos" pitchFamily="34" charset="0"/>
+                <a:ea typeface="Aptos" pitchFamily="34" charset="-122"/>
+                <a:cs typeface="Aptos" pitchFamily="34" charset="-120"/>
+              </a:rPr>
+              <a:t>•  </a:t>
+            </a:r>
+            <a:r>
+              <a:rPr lang="en-US" sz="1100" dirty="0">
+                <a:solidFill>
+                  <a:srgbClr val="5F6673"/>
+                </a:solidFill>
+                <a:latin typeface="Aptos" pitchFamily="34" charset="0"/>
+              </a:rPr>
+              <a:t>Pair F can improve sustained throughput on structured tasks, but the best speedup settings can substantially increase TTFT.</a:t>
+            </a:r>
+          </a:p>
+        </p:txBody>
+      </p:sp>
+      <p:pic>
+        <p:nvPicPr>
+          <p:cNvPr id="33" name="Picture 32">
+            <a:extLst>
+              <a:ext uri="{FF2B5EF4-FFF2-40B4-BE49-F238E27FC236}">
+                <a16:creationId xmlns:a16="http://schemas.microsoft.com/office/drawing/2014/main" id="{19280B4D-B640-9BDC-FA19-6006342A0FA7}"/>
+              </a:ext>
+            </a:extLst>
+          </p:cNvPr>
+          <p:cNvPicPr>
+            <a:picLocks noChangeAspect="1"/>
+          </p:cNvPicPr>
+          <p:nvPr/>
+        </p:nvPicPr>
+        <p:blipFill>
+          <a:blip r:embed="rId4"/>
+          <a:srcRect r="10308"/>
+          <a:stretch>
+            <a:fillRect/>
+          </a:stretch>
+        </p:blipFill>
+        <p:spPr>
+          <a:xfrm>
+            <a:off x="569894" y="1450762"/>
+            <a:ext cx="3678834" cy="1660927"/>
+          </a:xfrm>
+          <a:prstGeom prst="rect">
+            <a:avLst/>
+          </a:prstGeom>
+        </p:spPr>
+      </p:pic>
+      <p:sp>
+        <p:nvSpPr>
+          <p:cNvPr id="34" name="Rectangle 33">
+            <a:extLst>
+              <a:ext uri="{FF2B5EF4-FFF2-40B4-BE49-F238E27FC236}">
+                <a16:creationId xmlns:a16="http://schemas.microsoft.com/office/drawing/2014/main" id="{DB18B9A3-6EEE-F6F9-AC59-3A56C053C0F8}"/>
+              </a:ext>
+            </a:extLst>
+          </p:cNvPr>
+          <p:cNvSpPr/>
+          <p:nvPr/>
+        </p:nvSpPr>
+        <p:spPr>
+          <a:xfrm>
+            <a:off x="2205753" y="1499636"/>
+            <a:ext cx="1093517" cy="1612052"/>
+          </a:xfrm>
+          <a:prstGeom prst="rect">
+            <a:avLst/>
+          </a:prstGeom>
+          <a:noFill/>
+          <a:ln w="28575" cap="flat" cmpd="sng" algn="ctr">
+            <a:solidFill>
+              <a:srgbClr val="0070C0"/>
+            </a:solidFill>
+            <a:prstDash val="solid"/>
+            <a:round/>
+            <a:headEnd type="none" w="med" len="med"/>
+            <a:tailEnd type="none" w="med" len="med"/>
+          </a:ln>
+        </p:spPr>
+        <p:style>
+          <a:lnRef idx="0">
+            <a:scrgbClr r="0" g="0" b="0"/>
+          </a:lnRef>
+          <a:fillRef idx="0">
+            <a:scrgbClr r="0" g="0" b="0"/>
+          </a:fillRef>
+          <a:effectRef idx="0">
+            <a:scrgbClr r="0" g="0" b="0"/>
+          </a:effectRef>
+          <a:fontRef idx="minor">
+            <a:schemeClr val="accent6"/>
+          </a:fontRef>
+        </p:style>
+        <p:txBody>
+          <a:bodyPr rtlCol="0" anchor="ctr"/>
+          <a:lstStyle/>
+          <a:p>
+            <a:pPr algn="ctr"/>
+            <a:endParaRPr lang="en-KR"/>
+          </a:p>
+        </p:txBody>
+      </p:sp>
+      <p:pic>
+        <p:nvPicPr>
+          <p:cNvPr id="35" name="Picture 34">
+            <a:extLst>
+              <a:ext uri="{FF2B5EF4-FFF2-40B4-BE49-F238E27FC236}">
+                <a16:creationId xmlns:a16="http://schemas.microsoft.com/office/drawing/2014/main" id="{381E3D0C-385E-5500-D72D-F64CC1565869}"/>
+              </a:ext>
+            </a:extLst>
+          </p:cNvPr>
+          <p:cNvPicPr>
+            <a:picLocks noChangeAspect="1"/>
+          </p:cNvPicPr>
+          <p:nvPr/>
+        </p:nvPicPr>
+        <p:blipFill>
+          <a:blip r:embed="rId5"/>
+          <a:srcRect r="63618"/>
+          <a:stretch>
+            <a:fillRect/>
+          </a:stretch>
+        </p:blipFill>
+        <p:spPr>
+          <a:xfrm>
+            <a:off x="4248728" y="1538523"/>
+            <a:ext cx="2165666" cy="1528419"/>
+          </a:xfrm>
+          <a:prstGeom prst="rect">
+            <a:avLst/>
+          </a:prstGeom>
+        </p:spPr>
+      </p:pic>
+      <p:pic>
+        <p:nvPicPr>
+          <p:cNvPr id="36" name="Picture 35">
+            <a:extLst>
+              <a:ext uri="{FF2B5EF4-FFF2-40B4-BE49-F238E27FC236}">
+                <a16:creationId xmlns:a16="http://schemas.microsoft.com/office/drawing/2014/main" id="{17A603AB-6120-861C-E324-96BE54291FF7}"/>
+              </a:ext>
+            </a:extLst>
+          </p:cNvPr>
+          <p:cNvPicPr>
+            <a:picLocks noChangeAspect="1"/>
+          </p:cNvPicPr>
+          <p:nvPr/>
+        </p:nvPicPr>
+        <p:blipFill>
+          <a:blip r:embed="rId5"/>
+          <a:srcRect l="79902"/>
+          <a:stretch>
+            <a:fillRect/>
+          </a:stretch>
+        </p:blipFill>
+        <p:spPr>
+          <a:xfrm>
+            <a:off x="6414394" y="1543690"/>
+            <a:ext cx="1196357" cy="1528419"/>
+          </a:xfrm>
+          <a:prstGeom prst="rect">
+            <a:avLst/>
+          </a:prstGeom>
+        </p:spPr>
+      </p:pic>
+      <p:sp>
+        <p:nvSpPr>
+          <p:cNvPr id="37" name="Rectangle 36">
+            <a:extLst>
+              <a:ext uri="{FF2B5EF4-FFF2-40B4-BE49-F238E27FC236}">
+                <a16:creationId xmlns:a16="http://schemas.microsoft.com/office/drawing/2014/main" id="{F896AD01-D08A-931F-7F0A-31BAFF13ECAB}"/>
+              </a:ext>
+            </a:extLst>
+          </p:cNvPr>
+          <p:cNvSpPr/>
+          <p:nvPr/>
+        </p:nvSpPr>
+        <p:spPr>
+          <a:xfrm>
+            <a:off x="6414394" y="1543690"/>
+            <a:ext cx="616658" cy="1563178"/>
+          </a:xfrm>
+          <a:prstGeom prst="rect">
+            <a:avLst/>
+          </a:prstGeom>
+          <a:noFill/>
+          <a:ln w="28575" cap="flat" cmpd="sng" algn="ctr">
+            <a:solidFill>
+              <a:schemeClr val="accent2"/>
+            </a:solidFill>
+            <a:prstDash val="solid"/>
+            <a:round/>
+            <a:headEnd type="none" w="med" len="med"/>
+            <a:tailEnd type="none" w="med" len="med"/>
+          </a:ln>
+        </p:spPr>
+        <p:style>
+          <a:lnRef idx="0">
+            <a:scrgbClr r="0" g="0" b="0"/>
+          </a:lnRef>
+          <a:fillRef idx="0">
+            <a:scrgbClr r="0" g="0" b="0"/>
+          </a:fillRef>
+          <a:effectRef idx="0">
+            <a:scrgbClr r="0" g="0" b="0"/>
+          </a:effectRef>
+          <a:fontRef idx="minor">
+            <a:schemeClr val="accent6"/>
+          </a:fontRef>
+        </p:style>
+        <p:txBody>
+          <a:bodyPr rtlCol="0" anchor="ctr"/>
+          <a:lstStyle/>
+          <a:p>
+            <a:pPr algn="ctr"/>
+            <a:endParaRPr lang="en-KR"/>
+          </a:p>
+        </p:txBody>
+      </p:sp>
+      <p:sp>
+        <p:nvSpPr>
+          <p:cNvPr id="38" name="TextBox 37">
+            <a:extLst>
+              <a:ext uri="{FF2B5EF4-FFF2-40B4-BE49-F238E27FC236}">
+                <a16:creationId xmlns:a16="http://schemas.microsoft.com/office/drawing/2014/main" id="{18F8CE09-AA84-8D7A-8945-0E4D0DF84387}"/>
+              </a:ext>
+            </a:extLst>
+          </p:cNvPr>
+          <p:cNvSpPr txBox="1"/>
+          <p:nvPr/>
+        </p:nvSpPr>
+        <p:spPr>
+          <a:xfrm>
+            <a:off x="569893" y="1410835"/>
+            <a:ext cx="1224794" cy="261610"/>
+          </a:xfrm>
+          <a:prstGeom prst="rect">
+            <a:avLst/>
+          </a:prstGeom>
+          <a:noFill/>
+        </p:spPr>
+        <p:txBody>
+          <a:bodyPr wrap="square">
+            <a:spAutoFit/>
+          </a:bodyPr>
+          <a:lstStyle/>
+          <a:p>
+            <a:pPr marL="0" indent="0">
+              <a:buNone/>
+            </a:pPr>
+            <a:r>
+              <a:rPr lang="en-US" sz="1100" dirty="0">
+                <a:solidFill>
+                  <a:srgbClr val="2E7D32"/>
+                </a:solidFill>
+              </a:rPr>
+              <a:t>Baseline</a:t>
+            </a:r>
+            <a:endParaRPr lang="en-US" sz="1100" dirty="0"/>
+          </a:p>
+        </p:txBody>
+      </p:sp>
+      <p:sp>
+        <p:nvSpPr>
+          <p:cNvPr id="39" name="TextBox 38">
+            <a:extLst>
+              <a:ext uri="{FF2B5EF4-FFF2-40B4-BE49-F238E27FC236}">
+                <a16:creationId xmlns:a16="http://schemas.microsoft.com/office/drawing/2014/main" id="{B8FCAA6C-D9E6-38E2-F7B5-38D5892B6A29}"/>
+              </a:ext>
+            </a:extLst>
+          </p:cNvPr>
+          <p:cNvSpPr txBox="1"/>
+          <p:nvPr/>
+        </p:nvSpPr>
+        <p:spPr>
+          <a:xfrm>
+            <a:off x="4248728" y="1402469"/>
+            <a:ext cx="1093518" cy="261610"/>
+          </a:xfrm>
+          <a:prstGeom prst="rect">
+            <a:avLst/>
+          </a:prstGeom>
+          <a:noFill/>
+        </p:spPr>
+        <p:txBody>
+          <a:bodyPr wrap="square">
+            <a:spAutoFit/>
+          </a:bodyPr>
+          <a:lstStyle/>
+          <a:p>
+            <a:pPr marL="0" indent="0">
+              <a:buNone/>
+            </a:pPr>
+            <a:r>
+              <a:rPr lang="en-US" sz="1100" dirty="0">
+                <a:solidFill>
+                  <a:srgbClr val="2E7D32"/>
+                </a:solidFill>
+              </a:rPr>
+              <a:t>Speculative</a:t>
+            </a:r>
+            <a:endParaRPr lang="en-US" sz="1100" dirty="0"/>
+          </a:p>
+        </p:txBody>
+      </p:sp>
+      <p:sp>
+        <p:nvSpPr>
+          <p:cNvPr id="41" name="TextBox 40">
+            <a:extLst>
+              <a:ext uri="{FF2B5EF4-FFF2-40B4-BE49-F238E27FC236}">
+                <a16:creationId xmlns:a16="http://schemas.microsoft.com/office/drawing/2014/main" id="{C459988B-2160-0E64-C353-3CA6785DD281}"/>
+              </a:ext>
+            </a:extLst>
+          </p:cNvPr>
+          <p:cNvSpPr txBox="1"/>
+          <p:nvPr/>
+        </p:nvSpPr>
+        <p:spPr>
+          <a:xfrm>
+            <a:off x="640080" y="3250405"/>
+            <a:ext cx="2605588" cy="261610"/>
+          </a:xfrm>
+          <a:prstGeom prst="rect">
+            <a:avLst/>
+          </a:prstGeom>
+          <a:noFill/>
+        </p:spPr>
+        <p:txBody>
+          <a:bodyPr wrap="square">
+            <a:spAutoFit/>
+          </a:bodyPr>
+          <a:lstStyle/>
+          <a:p>
+            <a:r>
+              <a:rPr lang="en-US" sz="1100" b="1" dirty="0">
+                <a:solidFill>
+                  <a:srgbClr val="2E7D32"/>
+                </a:solidFill>
+              </a:rPr>
+              <a:t>Pair F task-level throughput</a:t>
+            </a:r>
+          </a:p>
+        </p:txBody>
+      </p:sp>
+      <p:sp>
+        <p:nvSpPr>
+          <p:cNvPr id="43" name="TextBox 42">
+            <a:extLst>
+              <a:ext uri="{FF2B5EF4-FFF2-40B4-BE49-F238E27FC236}">
+                <a16:creationId xmlns:a16="http://schemas.microsoft.com/office/drawing/2014/main" id="{DFA15E2D-C018-1039-F616-1757A89BE1AD}"/>
+              </a:ext>
+            </a:extLst>
+          </p:cNvPr>
+          <p:cNvSpPr txBox="1"/>
+          <p:nvPr/>
+        </p:nvSpPr>
+        <p:spPr>
+          <a:xfrm>
+            <a:off x="7888200" y="3356662"/>
+            <a:ext cx="1789111" cy="261610"/>
+          </a:xfrm>
+          <a:prstGeom prst="rect">
+            <a:avLst/>
+          </a:prstGeom>
+          <a:noFill/>
+        </p:spPr>
+        <p:txBody>
+          <a:bodyPr wrap="square">
+            <a:spAutoFit/>
+          </a:bodyPr>
+          <a:lstStyle/>
+          <a:p>
+            <a:r>
+              <a:rPr lang="en-US" sz="1100" b="1" dirty="0">
+                <a:solidFill>
+                  <a:srgbClr val="2E7D32"/>
+                </a:solidFill>
+              </a:rPr>
+              <a:t>Pair F task-level TTFT</a:t>
+            </a:r>
+          </a:p>
+        </p:txBody>
+      </p:sp>
+      <p:pic>
+        <p:nvPicPr>
+          <p:cNvPr id="8" name="Picture 7">
+            <a:extLst>
+              <a:ext uri="{FF2B5EF4-FFF2-40B4-BE49-F238E27FC236}">
+                <a16:creationId xmlns:a16="http://schemas.microsoft.com/office/drawing/2014/main" id="{67B53292-8858-7ED2-EFBB-89C8078EF7CD}"/>
+              </a:ext>
+            </a:extLst>
+          </p:cNvPr>
+          <p:cNvPicPr>
+            <a:picLocks noChangeAspect="1"/>
+          </p:cNvPicPr>
+          <p:nvPr/>
+        </p:nvPicPr>
+        <p:blipFill>
+          <a:blip r:embed="rId6"/>
+          <a:srcRect t="4277"/>
+          <a:stretch>
+            <a:fillRect/>
+          </a:stretch>
+        </p:blipFill>
+        <p:spPr>
+          <a:xfrm>
+            <a:off x="555025" y="3512015"/>
+            <a:ext cx="4787221" cy="2929375"/>
+          </a:xfrm>
+          <a:prstGeom prst="rect">
+            <a:avLst/>
+          </a:prstGeom>
+        </p:spPr>
+      </p:pic>
+    </p:spTree>
+  </p:cSld>
+  <p:clrMapOvr>
+    <a:masterClrMapping/>
+  </p:clrMapOvr>
+</p:sld>
+</file>
+
+<file path=ppt/slides/slide11.xml><?xml version="1.0" encoding="utf-8"?>
+<p:sld xmlns:a="http://schemas.openxmlformats.org/drawingml/2006/main" xmlns:r="http://schemas.openxmlformats.org/officeDocument/2006/relationships" xmlns:p="http://schemas.openxmlformats.org/presentationml/2006/main">
   <p:cSld>
     <p:spTree>
       <p:nvGrpSpPr>
@@ -4556,7 +5424,7 @@
 </p:sld>
 </file>
 
-<file path=ppt/slides/slide11.xml><?xml version="1.0" encoding="utf-8"?>
+<file path=ppt/slides/slide12.xml><?xml version="1.0" encoding="utf-8"?>
 <p:sld xmlns:a="http://schemas.openxmlformats.org/drawingml/2006/main" xmlns:r="http://schemas.openxmlformats.org/officeDocument/2006/relationships" xmlns:p="http://schemas.openxmlformats.org/presentationml/2006/main">
   <p:cSld>
     <p:spTree>
@@ -5052,7 +5920,7 @@
 </p:sld>
 </file>
 
-<file path=ppt/slides/slide12.xml><?xml version="1.0" encoding="utf-8"?>
+<file path=ppt/slides/slide13.xml><?xml version="1.0" encoding="utf-8"?>
 <p:sld xmlns:a="http://schemas.openxmlformats.org/drawingml/2006/main" xmlns:r="http://schemas.openxmlformats.org/officeDocument/2006/relationships" xmlns:p="http://schemas.openxmlformats.org/presentationml/2006/main">
   <p:cSld>
     <p:spTree>
@@ -5634,8 +6502,8 @@
           </a:p>
         </p:txBody>
       </p:sp>
-      <mc:AlternateContent xmlns:mc="http://schemas.openxmlformats.org/markup-compatibility/2006">
-        <mc:Choice xmlns:p14="http://schemas.microsoft.com/office/powerpoint/2010/main" Requires="p14">
+      <mc:AlternateContent xmlns:mc="http://schemas.openxmlformats.org/markup-compatibility/2006" xmlns:p14="http://schemas.microsoft.com/office/powerpoint/2010/main">
+        <mc:Choice Requires="p14">
           <p:contentPart p14:bwMode="auto" r:id="rId5">
             <p14:nvContentPartPr>
               <p14:cNvPr id="16" name="Ink 15">
@@ -5654,7 +6522,7 @@
             </p14:xfrm>
           </p:contentPart>
         </mc:Choice>
-        <mc:Fallback>
+        <mc:Fallback xmlns="">
           <p:pic>
             <p:nvPicPr>
               <p:cNvPr id="16" name="Ink 15">
@@ -5698,7 +6566,7 @@
 </p:sld>
 </file>
 
-<file path=ppt/slides/slide13.xml><?xml version="1.0" encoding="utf-8"?>
+<file path=ppt/slides/slide14.xml><?xml version="1.0" encoding="utf-8"?>
 <p:sld xmlns:a="http://schemas.openxmlformats.org/drawingml/2006/main" xmlns:r="http://schemas.openxmlformats.org/officeDocument/2006/relationships" xmlns:p="http://schemas.openxmlformats.org/presentationml/2006/main">
   <p:cSld name="Slide 9">
     <p:bg>
@@ -6368,7 +7236,7 @@
 </p:sld>
 </file>
 
-<file path=ppt/slides/slide14.xml><?xml version="1.0" encoding="utf-8"?>
+<file path=ppt/slides/slide15.xml><?xml version="1.0" encoding="utf-8"?>
 <p:sld xmlns:a="http://schemas.openxmlformats.org/drawingml/2006/main" xmlns:r="http://schemas.openxmlformats.org/officeDocument/2006/relationships" xmlns:p="http://schemas.openxmlformats.org/presentationml/2006/main">
   <p:cSld>
     <p:spTree>
@@ -9610,7 +10478,7 @@
               <a:rPr lang="en-US" sz="1100" dirty="0"/>
               <a:t>This creates a clear comparison between a separate draft model and a learned draft head.</a:t>
             </a:r>
-            <a:endParaRPr lang="en-KR" sz="1100">
+            <a:endParaRPr lang="en-KR" sz="1100" dirty="0">
               <a:solidFill>
                 <a:srgbClr val="5F6673"/>
               </a:solidFill>
@@ -13181,6 +14049,1523 @@
         <p:cNvPr id="1" name="">
           <a:extLst>
             <a:ext uri="{FF2B5EF4-FFF2-40B4-BE49-F238E27FC236}">
+              <a16:creationId xmlns:a16="http://schemas.microsoft.com/office/drawing/2014/main" id="{C2CF39BC-BEAE-DB48-2B62-3F961EF0392B}"/>
+            </a:ext>
+          </a:extLst>
+        </p:cNvPr>
+        <p:cNvGrpSpPr/>
+        <p:nvPr/>
+      </p:nvGrpSpPr>
+      <p:grpSpPr>
+        <a:xfrm>
+          <a:off x="0" y="0"/>
+          <a:ext cx="0" cy="0"/>
+          <a:chOff x="0" y="0"/>
+          <a:chExt cx="0" cy="0"/>
+        </a:xfrm>
+      </p:grpSpPr>
+      <p:sp>
+        <p:nvSpPr>
+          <p:cNvPr id="2" name="Shape 0">
+            <a:extLst>
+              <a:ext uri="{FF2B5EF4-FFF2-40B4-BE49-F238E27FC236}">
+                <a16:creationId xmlns:a16="http://schemas.microsoft.com/office/drawing/2014/main" id="{6FCD1F5D-CB95-850F-6D6B-4B7AA27EED51}"/>
+              </a:ext>
+            </a:extLst>
+          </p:cNvPr>
+          <p:cNvSpPr/>
+          <p:nvPr/>
+        </p:nvSpPr>
+        <p:spPr>
+          <a:xfrm>
+            <a:off x="305" y="7233"/>
+            <a:ext cx="12191695" cy="6843533"/>
+          </a:xfrm>
+          <a:prstGeom prst="rect">
+            <a:avLst/>
+          </a:prstGeom>
+          <a:solidFill>
+            <a:srgbClr val="FAFBF8"/>
+          </a:solidFill>
+          <a:ln w="12700">
+            <a:solidFill>
+              <a:srgbClr val="FAFBF8">
+                <a:alpha val="0"/>
+              </a:srgbClr>
+            </a:solidFill>
+            <a:prstDash val="solid"/>
+          </a:ln>
+        </p:spPr>
+        <p:txBody>
+          <a:bodyPr/>
+          <a:lstStyle/>
+          <a:p>
+            <a:endParaRPr lang="en-KR" dirty="0"/>
+          </a:p>
+        </p:txBody>
+      </p:sp>
+      <p:sp>
+        <p:nvSpPr>
+          <p:cNvPr id="3" name="Shape 1">
+            <a:extLst>
+              <a:ext uri="{FF2B5EF4-FFF2-40B4-BE49-F238E27FC236}">
+                <a16:creationId xmlns:a16="http://schemas.microsoft.com/office/drawing/2014/main" id="{8D21689D-BAB2-57C7-A6A5-056ED7C2FD73}"/>
+              </a:ext>
+            </a:extLst>
+          </p:cNvPr>
+          <p:cNvSpPr/>
+          <p:nvPr/>
+        </p:nvSpPr>
+        <p:spPr>
+          <a:xfrm>
+            <a:off x="0" y="0"/>
+            <a:ext cx="164592" cy="6858000"/>
+          </a:xfrm>
+          <a:prstGeom prst="rect">
+            <a:avLst/>
+          </a:prstGeom>
+          <a:solidFill>
+            <a:srgbClr val="6DBB2A"/>
+          </a:solidFill>
+          <a:ln w="12700">
+            <a:solidFill>
+              <a:srgbClr val="6DBB2A">
+                <a:alpha val="0"/>
+              </a:srgbClr>
+            </a:solidFill>
+            <a:prstDash val="solid"/>
+          </a:ln>
+        </p:spPr>
+        <p:txBody>
+          <a:bodyPr/>
+          <a:lstStyle/>
+          <a:p>
+            <a:endParaRPr lang="en-KR"/>
+          </a:p>
+        </p:txBody>
+      </p:sp>
+      <p:sp>
+        <p:nvSpPr>
+          <p:cNvPr id="4" name="Text 2">
+            <a:extLst>
+              <a:ext uri="{FF2B5EF4-FFF2-40B4-BE49-F238E27FC236}">
+                <a16:creationId xmlns:a16="http://schemas.microsoft.com/office/drawing/2014/main" id="{C0F62B10-BAB3-EA4D-5E32-10B4AEF9281D}"/>
+              </a:ext>
+            </a:extLst>
+          </p:cNvPr>
+          <p:cNvSpPr/>
+          <p:nvPr/>
+        </p:nvSpPr>
+        <p:spPr>
+          <a:xfrm>
+            <a:off x="640080" y="438912"/>
+            <a:ext cx="10607040" cy="502920"/>
+          </a:xfrm>
+          <a:prstGeom prst="rect">
+            <a:avLst/>
+          </a:prstGeom>
+          <a:noFill/>
+          <a:ln/>
+        </p:spPr>
+        <p:txBody>
+          <a:bodyPr wrap="square" lIns="0" tIns="0" rIns="0" bIns="0" rtlCol="0" anchor="ctr">
+            <a:normAutofit/>
+          </a:bodyPr>
+          <a:lstStyle/>
+          <a:p>
+            <a:r>
+              <a:rPr lang="en-US" sz="2800" b="1" dirty="0">
+                <a:solidFill>
+                  <a:srgbClr val="111827"/>
+                </a:solidFill>
+                <a:latin typeface="Aptos Display" pitchFamily="34" charset="0"/>
+              </a:rPr>
+              <a:t>Model Setup</a:t>
+            </a:r>
+            <a:endParaRPr lang="en-US" sz="2800" dirty="0"/>
+          </a:p>
+        </p:txBody>
+      </p:sp>
+      <p:sp>
+        <p:nvSpPr>
+          <p:cNvPr id="5" name="Text 3">
+            <a:extLst>
+              <a:ext uri="{FF2B5EF4-FFF2-40B4-BE49-F238E27FC236}">
+                <a16:creationId xmlns:a16="http://schemas.microsoft.com/office/drawing/2014/main" id="{7A1DE183-802D-F19C-C67D-BF0FDC43264F}"/>
+              </a:ext>
+            </a:extLst>
+          </p:cNvPr>
+          <p:cNvSpPr/>
+          <p:nvPr/>
+        </p:nvSpPr>
+        <p:spPr>
+          <a:xfrm>
+            <a:off x="658368" y="1024128"/>
+            <a:ext cx="9509760" cy="292608"/>
+          </a:xfrm>
+          <a:prstGeom prst="rect">
+            <a:avLst/>
+          </a:prstGeom>
+          <a:noFill/>
+          <a:ln/>
+        </p:spPr>
+        <p:txBody>
+          <a:bodyPr wrap="square" lIns="0" tIns="0" rIns="0" bIns="0" rtlCol="0" anchor="ctr"/>
+          <a:lstStyle/>
+          <a:p>
+            <a:pPr marL="0" indent="0">
+              <a:buNone/>
+            </a:pPr>
+            <a:r>
+              <a:rPr lang="en-US" sz="1250" dirty="0">
+                <a:solidFill>
+                  <a:srgbClr val="5F6673"/>
+                </a:solidFill>
+                <a:latin typeface="Aptos" pitchFamily="34" charset="0"/>
+                <a:ea typeface="Aptos" pitchFamily="34" charset="-122"/>
+                <a:cs typeface="Aptos" pitchFamily="34" charset="-120"/>
+              </a:rPr>
+              <a:t>We vary speculation length and randomness across all tasks</a:t>
+            </a:r>
+            <a:endParaRPr lang="en-US" sz="1250" dirty="0"/>
+          </a:p>
+        </p:txBody>
+      </p:sp>
+      <p:sp>
+        <p:nvSpPr>
+          <p:cNvPr id="6" name="Shape 4">
+            <a:extLst>
+              <a:ext uri="{FF2B5EF4-FFF2-40B4-BE49-F238E27FC236}">
+                <a16:creationId xmlns:a16="http://schemas.microsoft.com/office/drawing/2014/main" id="{99E4B59E-D2D7-995A-3715-7F6CD9C5E143}"/>
+              </a:ext>
+            </a:extLst>
+          </p:cNvPr>
+          <p:cNvSpPr/>
+          <p:nvPr/>
+        </p:nvSpPr>
+        <p:spPr>
+          <a:xfrm>
+            <a:off x="640080" y="1389888"/>
+            <a:ext cx="10881360" cy="0"/>
+          </a:xfrm>
+          <a:prstGeom prst="line">
+            <a:avLst/>
+          </a:prstGeom>
+          <a:noFill/>
+          <a:ln w="15240">
+            <a:solidFill>
+              <a:srgbClr val="D9E5D0"/>
+            </a:solidFill>
+            <a:prstDash val="solid"/>
+          </a:ln>
+        </p:spPr>
+        <p:txBody>
+          <a:bodyPr/>
+          <a:lstStyle/>
+          <a:p>
+            <a:endParaRPr lang="en-KR"/>
+          </a:p>
+        </p:txBody>
+      </p:sp>
+      <p:sp>
+        <p:nvSpPr>
+          <p:cNvPr id="7" name="Text 5">
+            <a:extLst>
+              <a:ext uri="{FF2B5EF4-FFF2-40B4-BE49-F238E27FC236}">
+                <a16:creationId xmlns:a16="http://schemas.microsoft.com/office/drawing/2014/main" id="{24E20E48-AEFE-C5E5-0F11-60AED03AE847}"/>
+              </a:ext>
+            </a:extLst>
+          </p:cNvPr>
+          <p:cNvSpPr/>
+          <p:nvPr/>
+        </p:nvSpPr>
+        <p:spPr>
+          <a:xfrm>
+            <a:off x="640080" y="6455664"/>
+            <a:ext cx="3474720" cy="201168"/>
+          </a:xfrm>
+          <a:prstGeom prst="rect">
+            <a:avLst/>
+          </a:prstGeom>
+          <a:noFill/>
+          <a:ln/>
+        </p:spPr>
+        <p:txBody>
+          <a:bodyPr wrap="square" lIns="0" tIns="0" rIns="0" bIns="0" rtlCol="0" anchor="ctr"/>
+          <a:lstStyle/>
+          <a:p>
+            <a:pPr marL="0" indent="0">
+              <a:buNone/>
+            </a:pPr>
+            <a:r>
+              <a:rPr lang="en-US" sz="850" dirty="0">
+                <a:solidFill>
+                  <a:srgbClr val="5F6673"/>
+                </a:solidFill>
+                <a:latin typeface="Aptos" pitchFamily="34" charset="0"/>
+                <a:ea typeface="Aptos" pitchFamily="34" charset="-122"/>
+                <a:cs typeface="Aptos" pitchFamily="34" charset="-120"/>
+              </a:rPr>
+              <a:t>Speculative Decoding Project  |  </a:t>
+            </a:r>
+            <a:r>
+              <a:rPr lang="en-US" altLang="ko-KR" sz="850" dirty="0">
+                <a:solidFill>
+                  <a:srgbClr val="5F6673"/>
+                </a:solidFill>
+                <a:latin typeface="Aptos" pitchFamily="34" charset="0"/>
+                <a:ea typeface="Aptos" pitchFamily="34" charset="-122"/>
+                <a:cs typeface="Aptos" pitchFamily="34" charset="-120"/>
+              </a:rPr>
+              <a:t>7</a:t>
+            </a:r>
+            <a:endParaRPr lang="en-US" sz="850" dirty="0"/>
+          </a:p>
+        </p:txBody>
+      </p:sp>
+      <p:sp>
+        <p:nvSpPr>
+          <p:cNvPr id="8" name="Text 6">
+            <a:extLst>
+              <a:ext uri="{FF2B5EF4-FFF2-40B4-BE49-F238E27FC236}">
+                <a16:creationId xmlns:a16="http://schemas.microsoft.com/office/drawing/2014/main" id="{E109084C-B23E-82EF-4C69-79C7A819E7A2}"/>
+              </a:ext>
+            </a:extLst>
+          </p:cNvPr>
+          <p:cNvSpPr/>
+          <p:nvPr/>
+        </p:nvSpPr>
+        <p:spPr>
+          <a:xfrm>
+            <a:off x="731520" y="1691640"/>
+            <a:ext cx="2286000" cy="320040"/>
+          </a:xfrm>
+          <a:prstGeom prst="rect">
+            <a:avLst/>
+          </a:prstGeom>
+          <a:noFill/>
+          <a:ln/>
+        </p:spPr>
+        <p:txBody>
+          <a:bodyPr wrap="square" lIns="0" tIns="0" rIns="0" bIns="0" rtlCol="0" anchor="ctr">
+            <a:normAutofit/>
+          </a:bodyPr>
+          <a:lstStyle/>
+          <a:p>
+            <a:pPr marL="0" indent="0">
+              <a:buNone/>
+            </a:pPr>
+            <a:r>
+              <a:rPr lang="en-US" b="1" dirty="0">
+                <a:solidFill>
+                  <a:srgbClr val="2E7D32"/>
+                </a:solidFill>
+                <a:ea typeface="Aptos Display" pitchFamily="34" charset="-122"/>
+                <a:cs typeface="Aptos Display" pitchFamily="34" charset="-120"/>
+              </a:rPr>
+              <a:t>Setup overview</a:t>
+            </a:r>
+            <a:endParaRPr lang="en-US" dirty="0"/>
+          </a:p>
+        </p:txBody>
+      </p:sp>
+      <p:sp>
+        <p:nvSpPr>
+          <p:cNvPr id="33" name="Text 31">
+            <a:extLst>
+              <a:ext uri="{FF2B5EF4-FFF2-40B4-BE49-F238E27FC236}">
+                <a16:creationId xmlns:a16="http://schemas.microsoft.com/office/drawing/2014/main" id="{DDD47587-5CE7-1B4F-9EED-C4D36EA618A2}"/>
+              </a:ext>
+            </a:extLst>
+          </p:cNvPr>
+          <p:cNvSpPr/>
+          <p:nvPr/>
+        </p:nvSpPr>
+        <p:spPr>
+          <a:xfrm>
+            <a:off x="5661290" y="2193246"/>
+            <a:ext cx="5585823" cy="959973"/>
+          </a:xfrm>
+          <a:prstGeom prst="rect">
+            <a:avLst/>
+          </a:prstGeom>
+          <a:solidFill>
+            <a:srgbClr val="FFFFFF"/>
+          </a:solidFill>
+          <a:ln w="12700">
+            <a:solidFill>
+              <a:srgbClr val="D9E5D0"/>
+            </a:solidFill>
+          </a:ln>
+        </p:spPr>
+        <p:txBody>
+          <a:bodyPr wrap="square" lIns="254" tIns="254" rIns="254" bIns="254" rtlCol="0" anchor="ctr"/>
+          <a:lstStyle/>
+          <a:p>
+            <a:pPr marL="0" indent="0" algn="ctr">
+              <a:buNone/>
+            </a:pPr>
+            <a:endParaRPr lang="en-US" sz="800" dirty="0"/>
+          </a:p>
+        </p:txBody>
+      </p:sp>
+      <p:sp>
+        <p:nvSpPr>
+          <p:cNvPr id="35" name="Text 33">
+            <a:extLst>
+              <a:ext uri="{FF2B5EF4-FFF2-40B4-BE49-F238E27FC236}">
+                <a16:creationId xmlns:a16="http://schemas.microsoft.com/office/drawing/2014/main" id="{A38A1CF5-2435-E531-AA09-2DEB86A621D2}"/>
+              </a:ext>
+            </a:extLst>
+          </p:cNvPr>
+          <p:cNvSpPr/>
+          <p:nvPr/>
+        </p:nvSpPr>
+        <p:spPr>
+          <a:xfrm>
+            <a:off x="5661289" y="3417199"/>
+            <a:ext cx="5585817" cy="959966"/>
+          </a:xfrm>
+          <a:prstGeom prst="rect">
+            <a:avLst/>
+          </a:prstGeom>
+          <a:solidFill>
+            <a:srgbClr val="FFFFFF"/>
+          </a:solidFill>
+          <a:ln w="12700">
+            <a:solidFill>
+              <a:srgbClr val="D9E5D0"/>
+            </a:solidFill>
+          </a:ln>
+        </p:spPr>
+        <p:txBody>
+          <a:bodyPr wrap="square" lIns="254" tIns="254" rIns="254" bIns="254" rtlCol="0" anchor="ctr"/>
+          <a:lstStyle/>
+          <a:p>
+            <a:pPr marL="0" indent="0" algn="ctr">
+              <a:buNone/>
+            </a:pPr>
+            <a:endParaRPr lang="en-US" sz="800" dirty="0"/>
+          </a:p>
+        </p:txBody>
+      </p:sp>
+      <p:sp>
+        <p:nvSpPr>
+          <p:cNvPr id="36" name="Text 34">
+            <a:extLst>
+              <a:ext uri="{FF2B5EF4-FFF2-40B4-BE49-F238E27FC236}">
+                <a16:creationId xmlns:a16="http://schemas.microsoft.com/office/drawing/2014/main" id="{6937C188-A4E8-3204-C50A-5344F59FD014}"/>
+              </a:ext>
+            </a:extLst>
+          </p:cNvPr>
+          <p:cNvSpPr/>
+          <p:nvPr/>
+        </p:nvSpPr>
+        <p:spPr>
+          <a:xfrm>
+            <a:off x="8679710" y="4304042"/>
+            <a:ext cx="274320" cy="228600"/>
+          </a:xfrm>
+          <a:prstGeom prst="rect">
+            <a:avLst/>
+          </a:prstGeom>
+          <a:noFill/>
+          <a:ln/>
+        </p:spPr>
+        <p:txBody>
+          <a:bodyPr wrap="square" lIns="0" tIns="0" rIns="0" bIns="0" rtlCol="0" anchor="ctr"/>
+          <a:lstStyle/>
+          <a:p>
+            <a:pPr marL="0" indent="0" algn="ctr">
+              <a:buNone/>
+            </a:pPr>
+            <a:endParaRPr lang="en-US" sz="1300" dirty="0"/>
+          </a:p>
+        </p:txBody>
+      </p:sp>
+      <p:sp>
+        <p:nvSpPr>
+          <p:cNvPr id="37" name="Text 35">
+            <a:extLst>
+              <a:ext uri="{FF2B5EF4-FFF2-40B4-BE49-F238E27FC236}">
+                <a16:creationId xmlns:a16="http://schemas.microsoft.com/office/drawing/2014/main" id="{559086DD-3DCE-C7E3-5CCC-A8E6635B9AC5}"/>
+              </a:ext>
+            </a:extLst>
+          </p:cNvPr>
+          <p:cNvSpPr/>
+          <p:nvPr/>
+        </p:nvSpPr>
+        <p:spPr>
+          <a:xfrm>
+            <a:off x="5661282" y="4658698"/>
+            <a:ext cx="5585814" cy="827503"/>
+          </a:xfrm>
+          <a:prstGeom prst="rect">
+            <a:avLst/>
+          </a:prstGeom>
+          <a:solidFill>
+            <a:srgbClr val="DDF6C1"/>
+          </a:solidFill>
+          <a:ln w="12700">
+            <a:solidFill>
+              <a:srgbClr val="D9E5D0"/>
+            </a:solidFill>
+          </a:ln>
+        </p:spPr>
+        <p:txBody>
+          <a:bodyPr wrap="square" lIns="254" tIns="254" rIns="254" bIns="254" rtlCol="0" anchor="ctr"/>
+          <a:lstStyle/>
+          <a:p>
+            <a:pPr marL="0" indent="0" algn="ctr">
+              <a:buNone/>
+            </a:pPr>
+            <a:endParaRPr lang="en-US" sz="900" dirty="0"/>
+          </a:p>
+        </p:txBody>
+      </p:sp>
+      <p:sp>
+        <p:nvSpPr>
+          <p:cNvPr id="38" name="Text 36">
+            <a:extLst>
+              <a:ext uri="{FF2B5EF4-FFF2-40B4-BE49-F238E27FC236}">
+                <a16:creationId xmlns:a16="http://schemas.microsoft.com/office/drawing/2014/main" id="{CCA65D42-89CA-E97A-66A1-8E3C3AE0B570}"/>
+              </a:ext>
+            </a:extLst>
+          </p:cNvPr>
+          <p:cNvSpPr/>
+          <p:nvPr/>
+        </p:nvSpPr>
+        <p:spPr>
+          <a:xfrm>
+            <a:off x="8679710" y="4944122"/>
+            <a:ext cx="274320" cy="228600"/>
+          </a:xfrm>
+          <a:prstGeom prst="rect">
+            <a:avLst/>
+          </a:prstGeom>
+          <a:noFill/>
+          <a:ln/>
+        </p:spPr>
+        <p:txBody>
+          <a:bodyPr wrap="square" lIns="0" tIns="0" rIns="0" bIns="0" rtlCol="0" anchor="ctr"/>
+          <a:lstStyle/>
+          <a:p>
+            <a:pPr marL="0" indent="0" algn="ctr">
+              <a:buNone/>
+            </a:pPr>
+            <a:endParaRPr lang="en-US" sz="1300" dirty="0"/>
+          </a:p>
+        </p:txBody>
+      </p:sp>
+      <p:sp>
+        <p:nvSpPr>
+          <p:cNvPr id="40" name="Text 38">
+            <a:extLst>
+              <a:ext uri="{FF2B5EF4-FFF2-40B4-BE49-F238E27FC236}">
+                <a16:creationId xmlns:a16="http://schemas.microsoft.com/office/drawing/2014/main" id="{7E5C28EA-A65F-C81B-1B81-460102DD52F5}"/>
+              </a:ext>
+            </a:extLst>
+          </p:cNvPr>
+          <p:cNvSpPr/>
+          <p:nvPr/>
+        </p:nvSpPr>
+        <p:spPr>
+          <a:xfrm>
+            <a:off x="8679710" y="5584202"/>
+            <a:ext cx="274320" cy="228600"/>
+          </a:xfrm>
+          <a:prstGeom prst="rect">
+            <a:avLst/>
+          </a:prstGeom>
+          <a:noFill/>
+          <a:ln/>
+        </p:spPr>
+        <p:txBody>
+          <a:bodyPr wrap="square" lIns="0" tIns="0" rIns="0" bIns="0" rtlCol="0" anchor="ctr"/>
+          <a:lstStyle/>
+          <a:p>
+            <a:pPr marL="0" indent="0" algn="ctr">
+              <a:buNone/>
+            </a:pPr>
+            <a:endParaRPr lang="en-US" sz="1300" dirty="0"/>
+          </a:p>
+        </p:txBody>
+      </p:sp>
+      <p:sp>
+        <p:nvSpPr>
+          <p:cNvPr id="42" name="Text 40">
+            <a:extLst>
+              <a:ext uri="{FF2B5EF4-FFF2-40B4-BE49-F238E27FC236}">
+                <a16:creationId xmlns:a16="http://schemas.microsoft.com/office/drawing/2014/main" id="{31983D74-7B9D-2F15-3EA4-132ECB992255}"/>
+              </a:ext>
+            </a:extLst>
+          </p:cNvPr>
+          <p:cNvSpPr/>
+          <p:nvPr/>
+        </p:nvSpPr>
+        <p:spPr>
+          <a:xfrm>
+            <a:off x="658368" y="2313431"/>
+            <a:ext cx="4198151" cy="3254241"/>
+          </a:xfrm>
+          <a:prstGeom prst="rect">
+            <a:avLst/>
+          </a:prstGeom>
+          <a:noFill/>
+          <a:ln/>
+        </p:spPr>
+        <p:txBody>
+          <a:bodyPr wrap="square" lIns="0" tIns="0" rIns="0" bIns="0" rtlCol="0" anchor="t">
+            <a:noAutofit/>
+          </a:bodyPr>
+          <a:lstStyle/>
+          <a:p>
+            <a:pPr>
+              <a:lnSpc>
+                <a:spcPct val="150000"/>
+              </a:lnSpc>
+              <a:spcAft>
+                <a:spcPts val="600"/>
+              </a:spcAft>
+            </a:pPr>
+            <a:r>
+              <a:rPr lang="en-US" sz="1600" b="1" dirty="0">
+                <a:solidFill>
+                  <a:srgbClr val="6DBB2A"/>
+                </a:solidFill>
+                <a:latin typeface="Aptos" pitchFamily="34" charset="0"/>
+                <a:ea typeface="Aptos" pitchFamily="34" charset="-122"/>
+                <a:cs typeface="Aptos" pitchFamily="34" charset="-120"/>
+              </a:rPr>
+              <a:t>•     </a:t>
+            </a:r>
+            <a:r>
+              <a:rPr lang="en-US" sz="1600" dirty="0">
+                <a:solidFill>
+                  <a:srgbClr val="5F6673"/>
+                </a:solidFill>
+                <a:latin typeface="Aptos" pitchFamily="34" charset="0"/>
+              </a:rPr>
+              <a:t>Benchmark runtime: around 10 hours</a:t>
+            </a:r>
+          </a:p>
+          <a:p>
+            <a:pPr>
+              <a:lnSpc>
+                <a:spcPct val="150000"/>
+              </a:lnSpc>
+              <a:spcAft>
+                <a:spcPts val="600"/>
+              </a:spcAft>
+            </a:pPr>
+            <a:r>
+              <a:rPr lang="en-US" sz="1600" b="1" dirty="0">
+                <a:solidFill>
+                  <a:srgbClr val="6DBB2A"/>
+                </a:solidFill>
+                <a:latin typeface="Aptos" pitchFamily="34" charset="0"/>
+                <a:ea typeface="Aptos" pitchFamily="34" charset="-122"/>
+                <a:cs typeface="Aptos" pitchFamily="34" charset="-120"/>
+              </a:rPr>
+              <a:t>•     </a:t>
+            </a:r>
+            <a:r>
+              <a:rPr lang="en-US" sz="1600" dirty="0">
+                <a:solidFill>
+                  <a:srgbClr val="5F6673"/>
+                </a:solidFill>
+                <a:latin typeface="Aptos" pitchFamily="34" charset="0"/>
+              </a:rPr>
+              <a:t>Pair F: target = Gemma-3-12B-it, draft = Gemma-3-1Bit</a:t>
+            </a:r>
+          </a:p>
+          <a:p>
+            <a:pPr>
+              <a:lnSpc>
+                <a:spcPct val="150000"/>
+              </a:lnSpc>
+              <a:spcAft>
+                <a:spcPts val="600"/>
+              </a:spcAft>
+            </a:pPr>
+            <a:r>
+              <a:rPr lang="en-US" sz="1600" b="1" dirty="0">
+                <a:solidFill>
+                  <a:srgbClr val="6DBB2A"/>
+                </a:solidFill>
+                <a:latin typeface="Aptos" pitchFamily="34" charset="0"/>
+                <a:ea typeface="Aptos" pitchFamily="34" charset="-122"/>
+                <a:cs typeface="Aptos" pitchFamily="34" charset="-120"/>
+              </a:rPr>
+              <a:t>•     </a:t>
+            </a:r>
+            <a:r>
+              <a:rPr lang="en-US" sz="1600" dirty="0">
+                <a:solidFill>
+                  <a:srgbClr val="5F6673"/>
+                </a:solidFill>
+                <a:latin typeface="Aptos" pitchFamily="34" charset="0"/>
+              </a:rPr>
+              <a:t>Bothe models come from the same Gemma instruction – tuned family</a:t>
+            </a:r>
+          </a:p>
+          <a:p>
+            <a:pPr>
+              <a:lnSpc>
+                <a:spcPct val="150000"/>
+              </a:lnSpc>
+              <a:spcAft>
+                <a:spcPts val="600"/>
+              </a:spcAft>
+            </a:pPr>
+            <a:r>
+              <a:rPr lang="en-US" sz="1600" b="1" dirty="0">
+                <a:solidFill>
+                  <a:srgbClr val="6DBB2A"/>
+                </a:solidFill>
+                <a:latin typeface="Aptos" pitchFamily="34" charset="0"/>
+                <a:ea typeface="Aptos" pitchFamily="34" charset="-122"/>
+                <a:cs typeface="Aptos" pitchFamily="34" charset="-120"/>
+              </a:rPr>
+              <a:t>•     </a:t>
+            </a:r>
+            <a:r>
+              <a:rPr lang="en-US" sz="1600" dirty="0">
+                <a:solidFill>
+                  <a:srgbClr val="5F6673"/>
+                </a:solidFill>
+                <a:latin typeface="Aptos" pitchFamily="34" charset="0"/>
+              </a:rPr>
+              <a:t>Similar model family helps align token distributions between draft and target</a:t>
+            </a:r>
+          </a:p>
+        </p:txBody>
+      </p:sp>
+      <p:sp>
+        <p:nvSpPr>
+          <p:cNvPr id="53" name="Text 4">
+            <a:extLst>
+              <a:ext uri="{FF2B5EF4-FFF2-40B4-BE49-F238E27FC236}">
+                <a16:creationId xmlns:a16="http://schemas.microsoft.com/office/drawing/2014/main" id="{5C95F417-FB66-D0EE-6CF5-20F4EE64D0C4}"/>
+              </a:ext>
+            </a:extLst>
+          </p:cNvPr>
+          <p:cNvSpPr/>
+          <p:nvPr/>
+        </p:nvSpPr>
+        <p:spPr>
+          <a:xfrm>
+            <a:off x="5796534" y="1658969"/>
+            <a:ext cx="4846320" cy="237744"/>
+          </a:xfrm>
+          <a:prstGeom prst="rect">
+            <a:avLst/>
+          </a:prstGeom>
+          <a:noFill/>
+          <a:ln/>
+        </p:spPr>
+        <p:txBody>
+          <a:bodyPr wrap="square" lIns="0" tIns="0" rIns="0" bIns="0" rtlCol="0" anchor="ctr"/>
+          <a:lstStyle/>
+          <a:p>
+            <a:pPr marL="0" indent="0">
+              <a:buNone/>
+            </a:pPr>
+            <a:r>
+              <a:rPr lang="en-US" b="1" dirty="0">
+                <a:solidFill>
+                  <a:srgbClr val="2E7D32"/>
+                </a:solidFill>
+              </a:rPr>
+              <a:t>Model Comparison: Pair F </a:t>
+            </a:r>
+            <a:endParaRPr lang="en-US" dirty="0"/>
+          </a:p>
+        </p:txBody>
+      </p:sp>
+      <p:sp>
+        <p:nvSpPr>
+          <p:cNvPr id="31" name="Shape 4">
+            <a:extLst>
+              <a:ext uri="{FF2B5EF4-FFF2-40B4-BE49-F238E27FC236}">
+                <a16:creationId xmlns:a16="http://schemas.microsoft.com/office/drawing/2014/main" id="{5946017D-BDA9-8BD3-8B73-6C85717C6381}"/>
+              </a:ext>
+            </a:extLst>
+          </p:cNvPr>
+          <p:cNvSpPr/>
+          <p:nvPr/>
+        </p:nvSpPr>
+        <p:spPr>
+          <a:xfrm flipH="1">
+            <a:off x="5291072" y="1568469"/>
+            <a:ext cx="1" cy="4015705"/>
+          </a:xfrm>
+          <a:prstGeom prst="line">
+            <a:avLst/>
+          </a:prstGeom>
+          <a:noFill/>
+          <a:ln w="15240">
+            <a:solidFill>
+              <a:srgbClr val="D9E5D0"/>
+            </a:solidFill>
+            <a:prstDash val="solid"/>
+          </a:ln>
+        </p:spPr>
+        <p:txBody>
+          <a:bodyPr/>
+          <a:lstStyle/>
+          <a:p>
+            <a:endParaRPr lang="en-KR"/>
+          </a:p>
+        </p:txBody>
+      </p:sp>
+      <p:sp>
+        <p:nvSpPr>
+          <p:cNvPr id="47" name="TextBox 46">
+            <a:extLst>
+              <a:ext uri="{FF2B5EF4-FFF2-40B4-BE49-F238E27FC236}">
+                <a16:creationId xmlns:a16="http://schemas.microsoft.com/office/drawing/2014/main" id="{F085637F-57FE-1F05-8AC3-881B59365001}"/>
+              </a:ext>
+            </a:extLst>
+          </p:cNvPr>
+          <p:cNvSpPr txBox="1"/>
+          <p:nvPr/>
+        </p:nvSpPr>
+        <p:spPr>
+          <a:xfrm>
+            <a:off x="6485093" y="2313431"/>
+            <a:ext cx="1369869" cy="338554"/>
+          </a:xfrm>
+          <a:prstGeom prst="rect">
+            <a:avLst/>
+          </a:prstGeom>
+          <a:noFill/>
+        </p:spPr>
+        <p:txBody>
+          <a:bodyPr wrap="square" rtlCol="0">
+            <a:spAutoFit/>
+          </a:bodyPr>
+          <a:lstStyle/>
+          <a:p>
+            <a:r>
+              <a:rPr lang="en-US" sz="1600" b="1" dirty="0"/>
+              <a:t>Target Model</a:t>
+            </a:r>
+            <a:endParaRPr lang="en-KR" sz="1600" b="1" dirty="0"/>
+          </a:p>
+        </p:txBody>
+      </p:sp>
+      <p:sp>
+        <p:nvSpPr>
+          <p:cNvPr id="48" name="TextBox 47">
+            <a:extLst>
+              <a:ext uri="{FF2B5EF4-FFF2-40B4-BE49-F238E27FC236}">
+                <a16:creationId xmlns:a16="http://schemas.microsoft.com/office/drawing/2014/main" id="{901FAB19-3F08-29DD-2CCC-4A9436567AD4}"/>
+              </a:ext>
+            </a:extLst>
+          </p:cNvPr>
+          <p:cNvSpPr txBox="1"/>
+          <p:nvPr/>
+        </p:nvSpPr>
+        <p:spPr>
+          <a:xfrm>
+            <a:off x="6462806" y="2694150"/>
+            <a:ext cx="1928834" cy="338554"/>
+          </a:xfrm>
+          <a:prstGeom prst="rect">
+            <a:avLst/>
+          </a:prstGeom>
+          <a:noFill/>
+        </p:spPr>
+        <p:txBody>
+          <a:bodyPr wrap="square" rtlCol="0">
+            <a:spAutoFit/>
+          </a:bodyPr>
+          <a:lstStyle/>
+          <a:p>
+            <a:r>
+              <a:rPr lang="en-KR" sz="1600" b="1" dirty="0"/>
+              <a:t>Gemma-3-12B-it </a:t>
+            </a:r>
+          </a:p>
+        </p:txBody>
+      </p:sp>
+      <p:sp>
+        <p:nvSpPr>
+          <p:cNvPr id="49" name="TextBox 48">
+            <a:extLst>
+              <a:ext uri="{FF2B5EF4-FFF2-40B4-BE49-F238E27FC236}">
+                <a16:creationId xmlns:a16="http://schemas.microsoft.com/office/drawing/2014/main" id="{1F7C5A82-435F-5E4C-B47A-A13E92C9F4EC}"/>
+              </a:ext>
+            </a:extLst>
+          </p:cNvPr>
+          <p:cNvSpPr txBox="1"/>
+          <p:nvPr/>
+        </p:nvSpPr>
+        <p:spPr>
+          <a:xfrm>
+            <a:off x="6462806" y="3541106"/>
+            <a:ext cx="1334529" cy="338554"/>
+          </a:xfrm>
+          <a:prstGeom prst="rect">
+            <a:avLst/>
+          </a:prstGeom>
+          <a:noFill/>
+        </p:spPr>
+        <p:txBody>
+          <a:bodyPr wrap="square" rtlCol="0">
+            <a:spAutoFit/>
+          </a:bodyPr>
+          <a:lstStyle/>
+          <a:p>
+            <a:r>
+              <a:rPr lang="en-US" sz="1600" b="1" dirty="0"/>
+              <a:t>Draft Model</a:t>
+            </a:r>
+            <a:endParaRPr lang="en-KR" sz="1600" b="1" dirty="0"/>
+          </a:p>
+        </p:txBody>
+      </p:sp>
+      <p:sp>
+        <p:nvSpPr>
+          <p:cNvPr id="50" name="TextBox 49">
+            <a:extLst>
+              <a:ext uri="{FF2B5EF4-FFF2-40B4-BE49-F238E27FC236}">
+                <a16:creationId xmlns:a16="http://schemas.microsoft.com/office/drawing/2014/main" id="{0733EF3E-0A22-1026-1CA9-CBD2C9CCEED7}"/>
+              </a:ext>
+            </a:extLst>
+          </p:cNvPr>
+          <p:cNvSpPr txBox="1"/>
+          <p:nvPr/>
+        </p:nvSpPr>
+        <p:spPr>
+          <a:xfrm>
+            <a:off x="6454711" y="3935352"/>
+            <a:ext cx="1692863" cy="338554"/>
+          </a:xfrm>
+          <a:prstGeom prst="rect">
+            <a:avLst/>
+          </a:prstGeom>
+          <a:noFill/>
+        </p:spPr>
+        <p:txBody>
+          <a:bodyPr wrap="square" rtlCol="0">
+            <a:spAutoFit/>
+          </a:bodyPr>
+          <a:lstStyle/>
+          <a:p>
+            <a:r>
+              <a:rPr lang="en-KR" sz="1600" b="1" dirty="0"/>
+              <a:t>Gemma-3-1B-it </a:t>
+            </a:r>
+          </a:p>
+        </p:txBody>
+      </p:sp>
+      <p:sp>
+        <p:nvSpPr>
+          <p:cNvPr id="51" name="Shape 4">
+            <a:extLst>
+              <a:ext uri="{FF2B5EF4-FFF2-40B4-BE49-F238E27FC236}">
+                <a16:creationId xmlns:a16="http://schemas.microsoft.com/office/drawing/2014/main" id="{BCD26EFF-B2D7-B686-35D3-B568B4EC50D8}"/>
+              </a:ext>
+            </a:extLst>
+          </p:cNvPr>
+          <p:cNvSpPr/>
+          <p:nvPr/>
+        </p:nvSpPr>
+        <p:spPr>
+          <a:xfrm>
+            <a:off x="8285324" y="2342796"/>
+            <a:ext cx="1732" cy="563852"/>
+          </a:xfrm>
+          <a:prstGeom prst="line">
+            <a:avLst/>
+          </a:prstGeom>
+          <a:noFill/>
+          <a:ln w="15240">
+            <a:solidFill>
+              <a:srgbClr val="D9E5D0"/>
+            </a:solidFill>
+            <a:prstDash val="solid"/>
+          </a:ln>
+        </p:spPr>
+        <p:txBody>
+          <a:bodyPr/>
+          <a:lstStyle/>
+          <a:p>
+            <a:endParaRPr lang="en-KR"/>
+          </a:p>
+        </p:txBody>
+      </p:sp>
+      <p:sp>
+        <p:nvSpPr>
+          <p:cNvPr id="52" name="Shape 4">
+            <a:extLst>
+              <a:ext uri="{FF2B5EF4-FFF2-40B4-BE49-F238E27FC236}">
+                <a16:creationId xmlns:a16="http://schemas.microsoft.com/office/drawing/2014/main" id="{2A91E18C-EA89-5514-7F36-C35C642092D8}"/>
+              </a:ext>
+            </a:extLst>
+          </p:cNvPr>
+          <p:cNvSpPr/>
+          <p:nvPr/>
+        </p:nvSpPr>
+        <p:spPr>
+          <a:xfrm>
+            <a:off x="8246037" y="3593478"/>
+            <a:ext cx="1732" cy="563852"/>
+          </a:xfrm>
+          <a:prstGeom prst="line">
+            <a:avLst/>
+          </a:prstGeom>
+          <a:noFill/>
+          <a:ln w="15240">
+            <a:solidFill>
+              <a:srgbClr val="D9E5D0"/>
+            </a:solidFill>
+            <a:prstDash val="solid"/>
+          </a:ln>
+        </p:spPr>
+        <p:txBody>
+          <a:bodyPr/>
+          <a:lstStyle/>
+          <a:p>
+            <a:endParaRPr lang="en-KR"/>
+          </a:p>
+        </p:txBody>
+      </p:sp>
+      <p:sp>
+        <p:nvSpPr>
+          <p:cNvPr id="63" name="TextBox 62">
+            <a:extLst>
+              <a:ext uri="{FF2B5EF4-FFF2-40B4-BE49-F238E27FC236}">
+                <a16:creationId xmlns:a16="http://schemas.microsoft.com/office/drawing/2014/main" id="{D14ED43B-6093-02BE-CB91-71451C59E027}"/>
+              </a:ext>
+            </a:extLst>
+          </p:cNvPr>
+          <p:cNvSpPr txBox="1"/>
+          <p:nvPr/>
+        </p:nvSpPr>
+        <p:spPr>
+          <a:xfrm>
+            <a:off x="5868849" y="4707710"/>
+            <a:ext cx="5344980" cy="738664"/>
+          </a:xfrm>
+          <a:prstGeom prst="rect">
+            <a:avLst/>
+          </a:prstGeom>
+          <a:noFill/>
+        </p:spPr>
+        <p:txBody>
+          <a:bodyPr wrap="square" rtlCol="0">
+            <a:spAutoFit/>
+          </a:bodyPr>
+          <a:lstStyle/>
+          <a:p>
+            <a:pPr>
+              <a:spcAft>
+                <a:spcPts val="600"/>
+              </a:spcAft>
+            </a:pPr>
+            <a:r>
+              <a:rPr lang="en-KR" sz="1400" dirty="0">
+                <a:solidFill>
+                  <a:srgbClr val="5F6673"/>
+                </a:solidFill>
+                <a:latin typeface="Aptos" pitchFamily="34" charset="0"/>
+              </a:rPr>
+              <a:t>4-bit quantization stores each weight with fewer bits, which reduces GPU memory usage while keeping the same model size in parameters.</a:t>
+            </a:r>
+          </a:p>
+        </p:txBody>
+      </p:sp>
+      <p:sp>
+        <p:nvSpPr>
+          <p:cNvPr id="65" name="TextBox 64">
+            <a:extLst>
+              <a:ext uri="{FF2B5EF4-FFF2-40B4-BE49-F238E27FC236}">
+                <a16:creationId xmlns:a16="http://schemas.microsoft.com/office/drawing/2014/main" id="{1CE48E2E-AB9F-0AB1-05B8-A9ECC592FC8A}"/>
+              </a:ext>
+            </a:extLst>
+          </p:cNvPr>
+          <p:cNvSpPr txBox="1"/>
+          <p:nvPr/>
+        </p:nvSpPr>
+        <p:spPr>
+          <a:xfrm>
+            <a:off x="5730742" y="2330864"/>
+            <a:ext cx="740121" cy="707886"/>
+          </a:xfrm>
+          <a:prstGeom prst="rect">
+            <a:avLst/>
+          </a:prstGeom>
+          <a:noFill/>
+        </p:spPr>
+        <p:txBody>
+          <a:bodyPr wrap="square">
+            <a:spAutoFit/>
+          </a:bodyPr>
+          <a:lstStyle/>
+          <a:p>
+            <a:r>
+              <a:rPr lang="en-KR" sz="4000" dirty="0"/>
+              <a:t>🎯</a:t>
+            </a:r>
+          </a:p>
+        </p:txBody>
+      </p:sp>
+      <p:sp>
+        <p:nvSpPr>
+          <p:cNvPr id="67" name="TextBox 66">
+            <a:extLst>
+              <a:ext uri="{FF2B5EF4-FFF2-40B4-BE49-F238E27FC236}">
+                <a16:creationId xmlns:a16="http://schemas.microsoft.com/office/drawing/2014/main" id="{5E693E75-9EB9-24AA-24CD-A567C4B24DF9}"/>
+              </a:ext>
+            </a:extLst>
+          </p:cNvPr>
+          <p:cNvSpPr txBox="1"/>
+          <p:nvPr/>
+        </p:nvSpPr>
+        <p:spPr>
+          <a:xfrm>
+            <a:off x="5666467" y="3541106"/>
+            <a:ext cx="860360" cy="830997"/>
+          </a:xfrm>
+          <a:prstGeom prst="rect">
+            <a:avLst/>
+          </a:prstGeom>
+          <a:noFill/>
+        </p:spPr>
+        <p:txBody>
+          <a:bodyPr wrap="square">
+            <a:spAutoFit/>
+          </a:bodyPr>
+          <a:lstStyle/>
+          <a:p>
+            <a:r>
+              <a:rPr lang="en-KR" sz="3600" dirty="0"/>
+              <a:t>✈️</a:t>
+            </a:r>
+            <a:r>
+              <a:rPr lang="en-KR" sz="4800" dirty="0"/>
+              <a:t> </a:t>
+            </a:r>
+          </a:p>
+        </p:txBody>
+      </p:sp>
+      <p:sp>
+        <p:nvSpPr>
+          <p:cNvPr id="70" name="TextBox 69">
+            <a:extLst>
+              <a:ext uri="{FF2B5EF4-FFF2-40B4-BE49-F238E27FC236}">
+                <a16:creationId xmlns:a16="http://schemas.microsoft.com/office/drawing/2014/main" id="{0AE684E2-D560-7B48-F924-E231D4AAEEF7}"/>
+              </a:ext>
+            </a:extLst>
+          </p:cNvPr>
+          <p:cNvSpPr txBox="1"/>
+          <p:nvPr/>
+        </p:nvSpPr>
+        <p:spPr>
+          <a:xfrm>
+            <a:off x="8263552" y="2218490"/>
+            <a:ext cx="3067251" cy="369332"/>
+          </a:xfrm>
+          <a:prstGeom prst="rect">
+            <a:avLst/>
+          </a:prstGeom>
+          <a:noFill/>
+        </p:spPr>
+        <p:txBody>
+          <a:bodyPr wrap="square" rtlCol="0">
+            <a:spAutoFit/>
+          </a:bodyPr>
+          <a:lstStyle/>
+          <a:p>
+            <a:r>
+              <a:rPr lang="en-KR" sz="1200" dirty="0"/>
+              <a:t>⚙️</a:t>
+            </a:r>
+            <a:r>
+              <a:rPr lang="en-KR" dirty="0"/>
+              <a:t> </a:t>
+            </a:r>
+            <a:r>
+              <a:rPr lang="en-US" sz="1400" dirty="0"/>
+              <a:t>P</a:t>
+            </a:r>
+            <a:r>
+              <a:rPr lang="en-KR" sz="1400" dirty="0"/>
+              <a:t>arameters</a:t>
+            </a:r>
+            <a:r>
+              <a:rPr lang="en-KR" sz="1200" dirty="0"/>
+              <a:t>:           ~12B parameters</a:t>
+            </a:r>
+            <a:endParaRPr lang="en-KR" dirty="0"/>
+          </a:p>
+        </p:txBody>
+      </p:sp>
+      <p:sp>
+        <p:nvSpPr>
+          <p:cNvPr id="71" name="TextBox 70">
+            <a:extLst>
+              <a:ext uri="{FF2B5EF4-FFF2-40B4-BE49-F238E27FC236}">
+                <a16:creationId xmlns:a16="http://schemas.microsoft.com/office/drawing/2014/main" id="{5BFEBD04-E8D5-78AF-BF9D-5F5A7C59FF12}"/>
+              </a:ext>
+            </a:extLst>
+          </p:cNvPr>
+          <p:cNvSpPr txBox="1"/>
+          <p:nvPr/>
+        </p:nvSpPr>
+        <p:spPr>
+          <a:xfrm>
+            <a:off x="8256865" y="2490030"/>
+            <a:ext cx="3067251" cy="369332"/>
+          </a:xfrm>
+          <a:prstGeom prst="rect">
+            <a:avLst/>
+          </a:prstGeom>
+          <a:noFill/>
+        </p:spPr>
+        <p:txBody>
+          <a:bodyPr wrap="square" rtlCol="0">
+            <a:spAutoFit/>
+          </a:bodyPr>
+          <a:lstStyle/>
+          <a:p>
+            <a:r>
+              <a:rPr lang="en-KR" sz="1200" dirty="0"/>
+              <a:t>💾</a:t>
+            </a:r>
+            <a:r>
+              <a:rPr lang="en-KR" dirty="0"/>
+              <a:t> </a:t>
+            </a:r>
+            <a:r>
+              <a:rPr lang="en-US" sz="1400" dirty="0"/>
+              <a:t>Precision</a:t>
+            </a:r>
+            <a:r>
+              <a:rPr lang="en-KR" sz="1400" dirty="0"/>
+              <a:t>:                </a:t>
+            </a:r>
+            <a:r>
+              <a:rPr lang="en-KR" sz="1200" dirty="0"/>
+              <a:t>4-bit quantized</a:t>
+            </a:r>
+            <a:endParaRPr lang="en-KR" dirty="0"/>
+          </a:p>
+        </p:txBody>
+      </p:sp>
+      <p:sp>
+        <p:nvSpPr>
+          <p:cNvPr id="72" name="TextBox 71">
+            <a:extLst>
+              <a:ext uri="{FF2B5EF4-FFF2-40B4-BE49-F238E27FC236}">
+                <a16:creationId xmlns:a16="http://schemas.microsoft.com/office/drawing/2014/main" id="{A35CB446-BD46-1EB2-529D-9D7B2758E4F7}"/>
+              </a:ext>
+            </a:extLst>
+          </p:cNvPr>
+          <p:cNvSpPr txBox="1"/>
+          <p:nvPr/>
+        </p:nvSpPr>
+        <p:spPr>
+          <a:xfrm>
+            <a:off x="8256864" y="2794890"/>
+            <a:ext cx="3073937" cy="307777"/>
+          </a:xfrm>
+          <a:prstGeom prst="rect">
+            <a:avLst/>
+          </a:prstGeom>
+          <a:noFill/>
+        </p:spPr>
+        <p:txBody>
+          <a:bodyPr wrap="square" rtlCol="0">
+            <a:spAutoFit/>
+          </a:bodyPr>
+          <a:lstStyle/>
+          <a:p>
+            <a:r>
+              <a:rPr lang="en-KR" sz="1200" dirty="0"/>
+              <a:t>📌</a:t>
+            </a:r>
+            <a:r>
+              <a:rPr lang="en-KR" sz="1400" dirty="0"/>
+              <a:t> </a:t>
+            </a:r>
+            <a:r>
+              <a:rPr lang="en-US" sz="1400" dirty="0"/>
+              <a:t>Note</a:t>
+            </a:r>
+            <a:r>
+              <a:rPr lang="en-KR" sz="1400" dirty="0"/>
+              <a:t>:               </a:t>
+            </a:r>
+            <a:r>
+              <a:rPr lang="en-KR" sz="1100" dirty="0"/>
+              <a:t>Lower GPU memory usage</a:t>
+            </a:r>
+          </a:p>
+        </p:txBody>
+      </p:sp>
+      <p:sp>
+        <p:nvSpPr>
+          <p:cNvPr id="73" name="TextBox 72">
+            <a:extLst>
+              <a:ext uri="{FF2B5EF4-FFF2-40B4-BE49-F238E27FC236}">
+                <a16:creationId xmlns:a16="http://schemas.microsoft.com/office/drawing/2014/main" id="{20B1C4B0-22EC-C03A-55A0-4BDF2592E1B9}"/>
+              </a:ext>
+            </a:extLst>
+          </p:cNvPr>
+          <p:cNvSpPr txBox="1"/>
+          <p:nvPr/>
+        </p:nvSpPr>
+        <p:spPr>
+          <a:xfrm>
+            <a:off x="8252724" y="3457452"/>
+            <a:ext cx="3067251" cy="369332"/>
+          </a:xfrm>
+          <a:prstGeom prst="rect">
+            <a:avLst/>
+          </a:prstGeom>
+          <a:noFill/>
+        </p:spPr>
+        <p:txBody>
+          <a:bodyPr wrap="square" rtlCol="0">
+            <a:spAutoFit/>
+          </a:bodyPr>
+          <a:lstStyle/>
+          <a:p>
+            <a:r>
+              <a:rPr lang="en-KR" sz="1200" dirty="0"/>
+              <a:t>⚙️</a:t>
+            </a:r>
+            <a:r>
+              <a:rPr lang="en-KR" dirty="0"/>
+              <a:t> </a:t>
+            </a:r>
+            <a:r>
+              <a:rPr lang="en-US" sz="1400" dirty="0"/>
+              <a:t>P</a:t>
+            </a:r>
+            <a:r>
+              <a:rPr lang="en-KR" sz="1400" dirty="0"/>
+              <a:t>arameters</a:t>
+            </a:r>
+            <a:r>
+              <a:rPr lang="en-KR" sz="1200" dirty="0"/>
+              <a:t>:             ~1B parameters</a:t>
+            </a:r>
+            <a:endParaRPr lang="en-KR" dirty="0"/>
+          </a:p>
+        </p:txBody>
+      </p:sp>
+      <p:sp>
+        <p:nvSpPr>
+          <p:cNvPr id="74" name="TextBox 73">
+            <a:extLst>
+              <a:ext uri="{FF2B5EF4-FFF2-40B4-BE49-F238E27FC236}">
+                <a16:creationId xmlns:a16="http://schemas.microsoft.com/office/drawing/2014/main" id="{15CF2B0F-93FC-61B4-85D9-B756AC2AF55D}"/>
+              </a:ext>
+            </a:extLst>
+          </p:cNvPr>
+          <p:cNvSpPr txBox="1"/>
+          <p:nvPr/>
+        </p:nvSpPr>
+        <p:spPr>
+          <a:xfrm>
+            <a:off x="8246037" y="3728992"/>
+            <a:ext cx="3067251" cy="369332"/>
+          </a:xfrm>
+          <a:prstGeom prst="rect">
+            <a:avLst/>
+          </a:prstGeom>
+          <a:noFill/>
+        </p:spPr>
+        <p:txBody>
+          <a:bodyPr wrap="square" rtlCol="0">
+            <a:spAutoFit/>
+          </a:bodyPr>
+          <a:lstStyle/>
+          <a:p>
+            <a:r>
+              <a:rPr lang="en-KR" sz="1200" dirty="0"/>
+              <a:t>💾</a:t>
+            </a:r>
+            <a:r>
+              <a:rPr lang="en-KR" dirty="0"/>
+              <a:t> </a:t>
+            </a:r>
+            <a:r>
+              <a:rPr lang="en-US" sz="1400" dirty="0"/>
+              <a:t>Precision</a:t>
+            </a:r>
+            <a:r>
+              <a:rPr lang="en-KR" sz="1400" dirty="0"/>
+              <a:t>:                </a:t>
+            </a:r>
+            <a:r>
+              <a:rPr lang="en-KR" sz="1200" dirty="0"/>
+              <a:t>BF16</a:t>
+            </a:r>
+            <a:endParaRPr lang="en-KR" dirty="0"/>
+          </a:p>
+        </p:txBody>
+      </p:sp>
+      <p:sp>
+        <p:nvSpPr>
+          <p:cNvPr id="75" name="TextBox 74">
+            <a:extLst>
+              <a:ext uri="{FF2B5EF4-FFF2-40B4-BE49-F238E27FC236}">
+                <a16:creationId xmlns:a16="http://schemas.microsoft.com/office/drawing/2014/main" id="{41D4E297-BF6D-AD36-536A-82FC0C53E657}"/>
+              </a:ext>
+            </a:extLst>
+          </p:cNvPr>
+          <p:cNvSpPr txBox="1"/>
+          <p:nvPr/>
+        </p:nvSpPr>
+        <p:spPr>
+          <a:xfrm>
+            <a:off x="8246037" y="4033852"/>
+            <a:ext cx="3264574" cy="307777"/>
+          </a:xfrm>
+          <a:prstGeom prst="rect">
+            <a:avLst/>
+          </a:prstGeom>
+          <a:noFill/>
+        </p:spPr>
+        <p:txBody>
+          <a:bodyPr wrap="square" rtlCol="0">
+            <a:spAutoFit/>
+          </a:bodyPr>
+          <a:lstStyle/>
+          <a:p>
+            <a:r>
+              <a:rPr lang="en-KR" sz="1200" dirty="0"/>
+              <a:t>📌</a:t>
+            </a:r>
+            <a:r>
+              <a:rPr lang="en-KR" sz="1400" dirty="0"/>
+              <a:t> </a:t>
+            </a:r>
+            <a:r>
+              <a:rPr lang="en-US" sz="1400" dirty="0"/>
+              <a:t>Note</a:t>
+            </a:r>
+            <a:r>
+              <a:rPr lang="en-KR" sz="1400" dirty="0"/>
+              <a:t>:         </a:t>
+            </a:r>
+            <a:r>
+              <a:rPr lang="en-KR" sz="1100" dirty="0"/>
+              <a:t>stable and efficient generation</a:t>
+            </a:r>
+          </a:p>
+        </p:txBody>
+      </p:sp>
+      <p:sp>
+        <p:nvSpPr>
+          <p:cNvPr id="76" name="Text 33">
+            <a:extLst>
+              <a:ext uri="{FF2B5EF4-FFF2-40B4-BE49-F238E27FC236}">
+                <a16:creationId xmlns:a16="http://schemas.microsoft.com/office/drawing/2014/main" id="{F6983FE3-FE87-3F23-C484-7EABF3882C61}"/>
+              </a:ext>
+            </a:extLst>
+          </p:cNvPr>
+          <p:cNvSpPr/>
+          <p:nvPr/>
+        </p:nvSpPr>
+        <p:spPr>
+          <a:xfrm>
+            <a:off x="2574662" y="5715638"/>
+            <a:ext cx="8738625" cy="959966"/>
+          </a:xfrm>
+          <a:prstGeom prst="rect">
+            <a:avLst/>
+          </a:prstGeom>
+          <a:solidFill>
+            <a:srgbClr val="FFFFFF"/>
+          </a:solidFill>
+          <a:ln w="12700">
+            <a:solidFill>
+              <a:srgbClr val="D9E5D0"/>
+            </a:solidFill>
+          </a:ln>
+        </p:spPr>
+        <p:txBody>
+          <a:bodyPr wrap="square" lIns="254" tIns="254" rIns="254" bIns="254" rtlCol="0" anchor="ctr"/>
+          <a:lstStyle/>
+          <a:p>
+            <a:endParaRPr lang="en-KR" sz="4400" b="1" dirty="0"/>
+          </a:p>
+        </p:txBody>
+      </p:sp>
+      <p:sp>
+        <p:nvSpPr>
+          <p:cNvPr id="77" name="TextBox 76">
+            <a:extLst>
+              <a:ext uri="{FF2B5EF4-FFF2-40B4-BE49-F238E27FC236}">
+                <a16:creationId xmlns:a16="http://schemas.microsoft.com/office/drawing/2014/main" id="{A443BE6F-42F2-FCB6-39B0-E035382C74B9}"/>
+              </a:ext>
+            </a:extLst>
+          </p:cNvPr>
+          <p:cNvSpPr txBox="1"/>
+          <p:nvPr/>
+        </p:nvSpPr>
+        <p:spPr>
+          <a:xfrm>
+            <a:off x="3287284" y="5879465"/>
+            <a:ext cx="7410869" cy="584775"/>
+          </a:xfrm>
+          <a:prstGeom prst="rect">
+            <a:avLst/>
+          </a:prstGeom>
+          <a:noFill/>
+        </p:spPr>
+        <p:txBody>
+          <a:bodyPr wrap="square" rtlCol="0">
+            <a:spAutoFit/>
+          </a:bodyPr>
+          <a:lstStyle/>
+          <a:p>
+            <a:r>
+              <a:rPr lang="en-US" sz="1600" b="1" dirty="0">
+                <a:solidFill>
+                  <a:srgbClr val="5F6673"/>
+                </a:solidFill>
+                <a:latin typeface="Aptos" pitchFamily="34" charset="0"/>
+              </a:rPr>
+              <a:t>GOAL: Keep the target model strong, fit the setup on available GPU memory, and use a smaller draft model for efficient candidate generation</a:t>
+            </a:r>
+            <a:endParaRPr lang="en-KR" sz="1600" b="1" dirty="0">
+              <a:solidFill>
+                <a:srgbClr val="5F6673"/>
+              </a:solidFill>
+              <a:latin typeface="Aptos" pitchFamily="34" charset="0"/>
+            </a:endParaRPr>
+          </a:p>
+        </p:txBody>
+      </p:sp>
+    </p:spTree>
+    <p:extLst>
+      <p:ext uri="{BB962C8B-B14F-4D97-AF65-F5344CB8AC3E}">
+        <p14:creationId xmlns:p14="http://schemas.microsoft.com/office/powerpoint/2010/main" val="1519321621"/>
+      </p:ext>
+    </p:extLst>
+  </p:cSld>
+  <p:clrMapOvr>
+    <a:masterClrMapping/>
+  </p:clrMapOvr>
+</p:sld>
+</file>
+
+<file path=ppt/slides/slide8.xml><?xml version="1.0" encoding="utf-8"?>
+<p:sld xmlns:a="http://schemas.openxmlformats.org/drawingml/2006/main" xmlns:r="http://schemas.openxmlformats.org/officeDocument/2006/relationships" xmlns:p="http://schemas.openxmlformats.org/presentationml/2006/main">
+  <p:cSld>
+    <p:spTree>
+      <p:nvGrpSpPr>
+        <p:cNvPr id="1" name="">
+          <a:extLst>
+            <a:ext uri="{FF2B5EF4-FFF2-40B4-BE49-F238E27FC236}">
               <a16:creationId xmlns:a16="http://schemas.microsoft.com/office/drawing/2014/main" id="{4FDE8370-D964-70D8-26CF-EAFD478B346E}"/>
             </a:ext>
           </a:extLst>
@@ -13440,10 +15825,10 @@
       </p:sp>
       <p:pic>
         <p:nvPicPr>
-          <p:cNvPr id="13" name="Picture 12">
-            <a:extLst>
-              <a:ext uri="{FF2B5EF4-FFF2-40B4-BE49-F238E27FC236}">
-                <a16:creationId xmlns:a16="http://schemas.microsoft.com/office/drawing/2014/main" id="{527C2EFC-BEB4-42E3-40F1-4C349B5EB79A}"/>
+          <p:cNvPr id="12" name="Picture 11">
+            <a:extLst>
+              <a:ext uri="{FF2B5EF4-FFF2-40B4-BE49-F238E27FC236}">
+                <a16:creationId xmlns:a16="http://schemas.microsoft.com/office/drawing/2014/main" id="{279A273C-DCC6-30FB-4273-B32E76273E48}"/>
               </a:ext>
             </a:extLst>
           </p:cNvPr>
@@ -13454,43 +15839,12 @@
         </p:nvPicPr>
         <p:blipFill>
           <a:blip r:embed="rId3"/>
-          <a:srcRect t="1016"/>
           <a:stretch>
             <a:fillRect/>
           </a:stretch>
         </p:blipFill>
         <p:spPr>
           <a:xfrm>
-            <a:off x="5615709" y="3667150"/>
-            <a:ext cx="6363855" cy="2681353"/>
-          </a:xfrm>
-          <a:prstGeom prst="rect">
-            <a:avLst/>
-          </a:prstGeom>
-        </p:spPr>
-      </p:pic>
-      <p:pic>
-        <p:nvPicPr>
-          <p:cNvPr id="12" name="Picture 11">
-            <a:extLst>
-              <a:ext uri="{FF2B5EF4-FFF2-40B4-BE49-F238E27FC236}">
-                <a16:creationId xmlns:a16="http://schemas.microsoft.com/office/drawing/2014/main" id="{279A273C-DCC6-30FB-4273-B32E76273E48}"/>
-              </a:ext>
-            </a:extLst>
-          </p:cNvPr>
-          <p:cNvPicPr>
-            <a:picLocks noChangeAspect="1"/>
-          </p:cNvPicPr>
-          <p:nvPr/>
-        </p:nvPicPr>
-        <p:blipFill>
-          <a:blip r:embed="rId4"/>
-          <a:stretch>
-            <a:fillRect/>
-          </a:stretch>
-        </p:blipFill>
-        <p:spPr>
-          <a:xfrm>
             <a:off x="568297" y="1543690"/>
             <a:ext cx="7153303" cy="1885310"/>
           </a:xfrm>
@@ -13514,7 +15868,7 @@
           <p:nvPr/>
         </p:nvPicPr>
         <p:blipFill>
-          <a:blip r:embed="rId5"/>
+          <a:blip r:embed="rId4"/>
           <a:stretch>
             <a:fillRect/>
           </a:stretch>
@@ -13797,6 +16151,37 @@
           </a:p>
         </p:txBody>
       </p:sp>
+      <p:pic>
+        <p:nvPicPr>
+          <p:cNvPr id="8" name="Picture 7">
+            <a:extLst>
+              <a:ext uri="{FF2B5EF4-FFF2-40B4-BE49-F238E27FC236}">
+                <a16:creationId xmlns:a16="http://schemas.microsoft.com/office/drawing/2014/main" id="{796FF051-6BA1-3416-2EB2-000CC580B1A1}"/>
+              </a:ext>
+            </a:extLst>
+          </p:cNvPr>
+          <p:cNvPicPr>
+            <a:picLocks noChangeAspect="1"/>
+          </p:cNvPicPr>
+          <p:nvPr/>
+        </p:nvPicPr>
+        <p:blipFill>
+          <a:blip r:embed="rId5"/>
+          <a:srcRect l="2897" t="2923" r="3272" b="3324"/>
+          <a:stretch>
+            <a:fillRect/>
+          </a:stretch>
+        </p:blipFill>
+        <p:spPr>
+          <a:xfrm>
+            <a:off x="5413249" y="3667150"/>
+            <a:ext cx="6652372" cy="2620021"/>
+          </a:xfrm>
+          <a:prstGeom prst="rect">
+            <a:avLst/>
+          </a:prstGeom>
+        </p:spPr>
+      </p:pic>
     </p:spTree>
     <p:extLst>
       <p:ext uri="{BB962C8B-B14F-4D97-AF65-F5344CB8AC3E}">
@@ -13810,7 +16195,7 @@
 </p:sld>
 </file>
 
-<file path=ppt/slides/slide8.xml><?xml version="1.0" encoding="utf-8"?>
+<file path=ppt/slides/slide9.xml><?xml version="1.0" encoding="utf-8"?>
 <p:sld xmlns:a="http://schemas.openxmlformats.org/drawingml/2006/main" xmlns:r="http://schemas.openxmlformats.org/officeDocument/2006/relationships" xmlns:p="http://schemas.openxmlformats.org/presentationml/2006/main">
   <p:cSld>
     <p:spTree>
@@ -14440,764 +16825,6 @@
         <p14:creationId xmlns:p14="http://schemas.microsoft.com/office/powerpoint/2010/main" val="2394257431"/>
       </p:ext>
     </p:extLst>
-  </p:cSld>
-  <p:clrMapOvr>
-    <a:masterClrMapping/>
-  </p:clrMapOvr>
-</p:sld>
-</file>
-
-<file path=ppt/slides/slide9.xml><?xml version="1.0" encoding="utf-8"?>
-<p:sld xmlns:a="http://schemas.openxmlformats.org/drawingml/2006/main" xmlns:r="http://schemas.openxmlformats.org/officeDocument/2006/relationships" xmlns:p="http://schemas.openxmlformats.org/presentationml/2006/main">
-  <p:cSld name="Slide 8">
-    <p:bg>
-      <p:bgPr>
-        <a:solidFill>
-          <a:srgbClr val="FAFBF8"/>
-        </a:solidFill>
-        <a:effectLst/>
-      </p:bgPr>
-    </p:bg>
-    <p:spTree>
-      <p:nvGrpSpPr>
-        <p:cNvPr id="1" name=""/>
-        <p:cNvGrpSpPr/>
-        <p:nvPr/>
-      </p:nvGrpSpPr>
-      <p:grpSpPr>
-        <a:xfrm>
-          <a:off x="0" y="0"/>
-          <a:ext cx="0" cy="0"/>
-          <a:chOff x="0" y="0"/>
-          <a:chExt cx="0" cy="0"/>
-        </a:xfrm>
-      </p:grpSpPr>
-      <p:sp>
-        <p:nvSpPr>
-          <p:cNvPr id="2" name="Shape 0"/>
-          <p:cNvSpPr/>
-          <p:nvPr/>
-        </p:nvSpPr>
-        <p:spPr>
-          <a:xfrm>
-            <a:off x="0" y="0"/>
-            <a:ext cx="12191695" cy="6858000"/>
-          </a:xfrm>
-          <a:prstGeom prst="rect">
-            <a:avLst/>
-          </a:prstGeom>
-          <a:solidFill>
-            <a:srgbClr val="FAFBF8"/>
-          </a:solidFill>
-          <a:ln w="12700">
-            <a:solidFill>
-              <a:srgbClr val="FAFBF8">
-                <a:alpha val="0"/>
-              </a:srgbClr>
-            </a:solidFill>
-            <a:prstDash val="solid"/>
-          </a:ln>
-        </p:spPr>
-        <p:txBody>
-          <a:bodyPr/>
-          <a:lstStyle/>
-          <a:p>
-            <a:endParaRPr lang="en-KR">
-              <a:highlight>
-                <a:srgbClr val="FFFF00"/>
-              </a:highlight>
-            </a:endParaRPr>
-          </a:p>
-        </p:txBody>
-      </p:sp>
-      <p:sp>
-        <p:nvSpPr>
-          <p:cNvPr id="3" name="Shape 1"/>
-          <p:cNvSpPr/>
-          <p:nvPr/>
-        </p:nvSpPr>
-        <p:spPr>
-          <a:xfrm>
-            <a:off x="0" y="0"/>
-            <a:ext cx="164592" cy="6858000"/>
-          </a:xfrm>
-          <a:prstGeom prst="rect">
-            <a:avLst/>
-          </a:prstGeom>
-          <a:solidFill>
-            <a:srgbClr val="6DBB2A"/>
-          </a:solidFill>
-          <a:ln w="12700">
-            <a:solidFill>
-              <a:srgbClr val="6DBB2A">
-                <a:alpha val="0"/>
-              </a:srgbClr>
-            </a:solidFill>
-            <a:prstDash val="solid"/>
-          </a:ln>
-        </p:spPr>
-        <p:txBody>
-          <a:bodyPr/>
-          <a:lstStyle/>
-          <a:p>
-            <a:endParaRPr lang="en-KR"/>
-          </a:p>
-        </p:txBody>
-      </p:sp>
-      <p:sp>
-        <p:nvSpPr>
-          <p:cNvPr id="4" name="Text 2"/>
-          <p:cNvSpPr/>
-          <p:nvPr/>
-        </p:nvSpPr>
-        <p:spPr>
-          <a:xfrm>
-            <a:off x="640080" y="438912"/>
-            <a:ext cx="10607040" cy="502920"/>
-          </a:xfrm>
-          <a:prstGeom prst="rect">
-            <a:avLst/>
-          </a:prstGeom>
-          <a:noFill/>
-          <a:ln/>
-        </p:spPr>
-        <p:txBody>
-          <a:bodyPr wrap="square" lIns="0" tIns="0" rIns="0" bIns="0" rtlCol="0" anchor="ctr">
-            <a:normAutofit/>
-          </a:bodyPr>
-          <a:lstStyle/>
-          <a:p>
-            <a:r>
-              <a:rPr lang="en-US" sz="2800" b="1" dirty="0"/>
-              <a:t>Pair F Observation: Throughput–Latency Trade-off</a:t>
-            </a:r>
-            <a:endParaRPr lang="en-US" sz="2800" dirty="0"/>
-          </a:p>
-        </p:txBody>
-      </p:sp>
-      <p:sp>
-        <p:nvSpPr>
-          <p:cNvPr id="5" name="Text 3"/>
-          <p:cNvSpPr/>
-          <p:nvPr/>
-        </p:nvSpPr>
-        <p:spPr>
-          <a:xfrm>
-            <a:off x="658368" y="973008"/>
-            <a:ext cx="9509760" cy="332147"/>
-          </a:xfrm>
-          <a:prstGeom prst="rect">
-            <a:avLst/>
-          </a:prstGeom>
-          <a:noFill/>
-          <a:ln/>
-        </p:spPr>
-        <p:txBody>
-          <a:bodyPr wrap="square" lIns="0" tIns="0" rIns="0" bIns="0" rtlCol="0" anchor="ctr"/>
-          <a:lstStyle/>
-          <a:p>
-            <a:r>
-              <a:rPr lang="en-US" sz="1250" dirty="0">
-                <a:solidFill>
-                  <a:srgbClr val="5F6673"/>
-                </a:solidFill>
-                <a:latin typeface="Aptos" pitchFamily="34" charset="0"/>
-              </a:rPr>
-              <a:t>Best speculative settings can improve throughput but increase TTFT</a:t>
-            </a:r>
-          </a:p>
-        </p:txBody>
-      </p:sp>
-      <p:sp>
-        <p:nvSpPr>
-          <p:cNvPr id="6" name="Shape 4"/>
-          <p:cNvSpPr/>
-          <p:nvPr/>
-        </p:nvSpPr>
-        <p:spPr>
-          <a:xfrm>
-            <a:off x="640080" y="1389888"/>
-            <a:ext cx="10881360" cy="0"/>
-          </a:xfrm>
-          <a:prstGeom prst="line">
-            <a:avLst/>
-          </a:prstGeom>
-          <a:noFill/>
-          <a:ln w="15240">
-            <a:solidFill>
-              <a:srgbClr val="D9E5D0"/>
-            </a:solidFill>
-            <a:prstDash val="solid"/>
-          </a:ln>
-        </p:spPr>
-        <p:txBody>
-          <a:bodyPr/>
-          <a:lstStyle/>
-          <a:p>
-            <a:endParaRPr lang="en-KR"/>
-          </a:p>
-        </p:txBody>
-      </p:sp>
-      <p:sp>
-        <p:nvSpPr>
-          <p:cNvPr id="7" name="Text 5"/>
-          <p:cNvSpPr/>
-          <p:nvPr/>
-        </p:nvSpPr>
-        <p:spPr>
-          <a:xfrm>
-            <a:off x="640080" y="6455664"/>
-            <a:ext cx="3474720" cy="201168"/>
-          </a:xfrm>
-          <a:prstGeom prst="rect">
-            <a:avLst/>
-          </a:prstGeom>
-          <a:noFill/>
-          <a:ln/>
-        </p:spPr>
-        <p:txBody>
-          <a:bodyPr wrap="square" lIns="0" tIns="0" rIns="0" bIns="0" rtlCol="0" anchor="ctr"/>
-          <a:lstStyle/>
-          <a:p>
-            <a:pPr marL="0" indent="0">
-              <a:buNone/>
-            </a:pPr>
-            <a:r>
-              <a:rPr lang="en-US" sz="850" dirty="0">
-                <a:solidFill>
-                  <a:srgbClr val="5F6673"/>
-                </a:solidFill>
-                <a:latin typeface="Aptos" pitchFamily="34" charset="0"/>
-                <a:ea typeface="Aptos" pitchFamily="34" charset="-122"/>
-                <a:cs typeface="Aptos" pitchFamily="34" charset="-120"/>
-              </a:rPr>
-              <a:t>Speculative Decoding Project  |  10</a:t>
-            </a:r>
-            <a:endParaRPr lang="en-US" sz="850" dirty="0"/>
-          </a:p>
-        </p:txBody>
-      </p:sp>
-      <p:pic>
-        <p:nvPicPr>
-          <p:cNvPr id="15" name="Picture 14">
-            <a:extLst>
-              <a:ext uri="{FF2B5EF4-FFF2-40B4-BE49-F238E27FC236}">
-                <a16:creationId xmlns:a16="http://schemas.microsoft.com/office/drawing/2014/main" id="{25FB994B-060E-80FF-1B34-A69ACEEB89CF}"/>
-              </a:ext>
-            </a:extLst>
-          </p:cNvPr>
-          <p:cNvPicPr>
-            <a:picLocks noChangeAspect="1"/>
-          </p:cNvPicPr>
-          <p:nvPr/>
-        </p:nvPicPr>
-        <p:blipFill>
-          <a:blip r:embed="rId3"/>
-          <a:stretch>
-            <a:fillRect/>
-          </a:stretch>
-        </p:blipFill>
-        <p:spPr>
-          <a:xfrm>
-            <a:off x="640080" y="3512015"/>
-            <a:ext cx="4449156" cy="2884839"/>
-          </a:xfrm>
-          <a:prstGeom prst="rect">
-            <a:avLst/>
-          </a:prstGeom>
-        </p:spPr>
-      </p:pic>
-      <p:pic>
-        <p:nvPicPr>
-          <p:cNvPr id="16" name="Image 0">
-            <a:extLst>
-              <a:ext uri="{FF2B5EF4-FFF2-40B4-BE49-F238E27FC236}">
-                <a16:creationId xmlns:a16="http://schemas.microsoft.com/office/drawing/2014/main" id="{127AF43F-9B8D-2055-F9D1-B46D4CBF24DA}"/>
-              </a:ext>
-            </a:extLst>
-          </p:cNvPr>
-          <p:cNvPicPr>
-            <a:picLocks noChangeAspect="1"/>
-          </p:cNvPicPr>
-          <p:nvPr/>
-        </p:nvPicPr>
-        <p:blipFill>
-          <a:blip r:embed="rId4"/>
-          <a:srcRect t="8191"/>
-          <a:stretch>
-            <a:fillRect/>
-          </a:stretch>
-        </p:blipFill>
-        <p:spPr>
-          <a:xfrm>
-            <a:off x="5449824" y="3337567"/>
-            <a:ext cx="5920285" cy="3118474"/>
-          </a:xfrm>
-          <a:prstGeom prst="rect">
-            <a:avLst/>
-          </a:prstGeom>
-        </p:spPr>
-      </p:pic>
-      <p:sp>
-        <p:nvSpPr>
-          <p:cNvPr id="19" name="TextBox 18">
-            <a:extLst>
-              <a:ext uri="{FF2B5EF4-FFF2-40B4-BE49-F238E27FC236}">
-                <a16:creationId xmlns:a16="http://schemas.microsoft.com/office/drawing/2014/main" id="{7844B5FA-FCEC-99B9-C4C7-C03EC80BC26A}"/>
-              </a:ext>
-            </a:extLst>
-          </p:cNvPr>
-          <p:cNvSpPr txBox="1"/>
-          <p:nvPr/>
-        </p:nvSpPr>
-        <p:spPr>
-          <a:xfrm>
-            <a:off x="7997928" y="1922493"/>
-            <a:ext cx="1224794" cy="338554"/>
-          </a:xfrm>
-          <a:prstGeom prst="rect">
-            <a:avLst/>
-          </a:prstGeom>
-          <a:noFill/>
-        </p:spPr>
-        <p:txBody>
-          <a:bodyPr wrap="square">
-            <a:spAutoFit/>
-          </a:bodyPr>
-          <a:lstStyle/>
-          <a:p>
-            <a:pPr marL="0" indent="0">
-              <a:buNone/>
-            </a:pPr>
-            <a:r>
-              <a:rPr lang="en-US" sz="1600" b="1" dirty="0">
-                <a:solidFill>
-                  <a:srgbClr val="2E7D32"/>
-                </a:solidFill>
-              </a:rPr>
-              <a:t>Takeaway</a:t>
-            </a:r>
-            <a:endParaRPr lang="en-US" sz="1600" dirty="0"/>
-          </a:p>
-        </p:txBody>
-      </p:sp>
-      <p:sp>
-        <p:nvSpPr>
-          <p:cNvPr id="20" name="TextBox 19">
-            <a:extLst>
-              <a:ext uri="{FF2B5EF4-FFF2-40B4-BE49-F238E27FC236}">
-                <a16:creationId xmlns:a16="http://schemas.microsoft.com/office/drawing/2014/main" id="{43CCDA49-B2E1-EBD4-22CD-8440151F7F2E}"/>
-              </a:ext>
-            </a:extLst>
-          </p:cNvPr>
-          <p:cNvSpPr txBox="1"/>
-          <p:nvPr/>
-        </p:nvSpPr>
-        <p:spPr>
-          <a:xfrm>
-            <a:off x="7997928" y="2219232"/>
-            <a:ext cx="3624178" cy="615553"/>
-          </a:xfrm>
-          <a:prstGeom prst="rect">
-            <a:avLst/>
-          </a:prstGeom>
-          <a:noFill/>
-        </p:spPr>
-        <p:txBody>
-          <a:bodyPr wrap="square">
-            <a:spAutoFit/>
-          </a:bodyPr>
-          <a:lstStyle/>
-          <a:p>
-            <a:r>
-              <a:rPr lang="en-US" sz="1200" b="1" dirty="0">
-                <a:solidFill>
-                  <a:srgbClr val="6DBB2A"/>
-                </a:solidFill>
-                <a:latin typeface="Aptos" pitchFamily="34" charset="0"/>
-                <a:ea typeface="Aptos" pitchFamily="34" charset="-122"/>
-                <a:cs typeface="Aptos" pitchFamily="34" charset="-120"/>
-              </a:rPr>
-              <a:t>•  </a:t>
-            </a:r>
-            <a:r>
-              <a:rPr lang="en-US" sz="1100" dirty="0">
-                <a:solidFill>
-                  <a:srgbClr val="5F6673"/>
-                </a:solidFill>
-                <a:latin typeface="Aptos" pitchFamily="34" charset="0"/>
-              </a:rPr>
-              <a:t>Pair F can improve sustained throughput on structured tasks, but the best speedup settings can substantially increase TTFT.</a:t>
-            </a:r>
-          </a:p>
-        </p:txBody>
-      </p:sp>
-      <p:pic>
-        <p:nvPicPr>
-          <p:cNvPr id="33" name="Picture 32">
-            <a:extLst>
-              <a:ext uri="{FF2B5EF4-FFF2-40B4-BE49-F238E27FC236}">
-                <a16:creationId xmlns:a16="http://schemas.microsoft.com/office/drawing/2014/main" id="{19280B4D-B640-9BDC-FA19-6006342A0FA7}"/>
-              </a:ext>
-            </a:extLst>
-          </p:cNvPr>
-          <p:cNvPicPr>
-            <a:picLocks noChangeAspect="1"/>
-          </p:cNvPicPr>
-          <p:nvPr/>
-        </p:nvPicPr>
-        <p:blipFill>
-          <a:blip r:embed="rId5"/>
-          <a:srcRect r="10308"/>
-          <a:stretch>
-            <a:fillRect/>
-          </a:stretch>
-        </p:blipFill>
-        <p:spPr>
-          <a:xfrm>
-            <a:off x="569894" y="1450762"/>
-            <a:ext cx="3678834" cy="1660927"/>
-          </a:xfrm>
-          <a:prstGeom prst="rect">
-            <a:avLst/>
-          </a:prstGeom>
-        </p:spPr>
-      </p:pic>
-      <p:sp>
-        <p:nvSpPr>
-          <p:cNvPr id="34" name="Rectangle 33">
-            <a:extLst>
-              <a:ext uri="{FF2B5EF4-FFF2-40B4-BE49-F238E27FC236}">
-                <a16:creationId xmlns:a16="http://schemas.microsoft.com/office/drawing/2014/main" id="{DB18B9A3-6EEE-F6F9-AC59-3A56C053C0F8}"/>
-              </a:ext>
-            </a:extLst>
-          </p:cNvPr>
-          <p:cNvSpPr/>
-          <p:nvPr/>
-        </p:nvSpPr>
-        <p:spPr>
-          <a:xfrm>
-            <a:off x="2205753" y="1499636"/>
-            <a:ext cx="1093517" cy="1612052"/>
-          </a:xfrm>
-          <a:prstGeom prst="rect">
-            <a:avLst/>
-          </a:prstGeom>
-          <a:noFill/>
-          <a:ln w="28575" cap="flat" cmpd="sng" algn="ctr">
-            <a:solidFill>
-              <a:srgbClr val="0070C0"/>
-            </a:solidFill>
-            <a:prstDash val="solid"/>
-            <a:round/>
-            <a:headEnd type="none" w="med" len="med"/>
-            <a:tailEnd type="none" w="med" len="med"/>
-          </a:ln>
-        </p:spPr>
-        <p:style>
-          <a:lnRef idx="0">
-            <a:scrgbClr r="0" g="0" b="0"/>
-          </a:lnRef>
-          <a:fillRef idx="0">
-            <a:scrgbClr r="0" g="0" b="0"/>
-          </a:fillRef>
-          <a:effectRef idx="0">
-            <a:scrgbClr r="0" g="0" b="0"/>
-          </a:effectRef>
-          <a:fontRef idx="minor">
-            <a:schemeClr val="accent6"/>
-          </a:fontRef>
-        </p:style>
-        <p:txBody>
-          <a:bodyPr rtlCol="0" anchor="ctr"/>
-          <a:lstStyle/>
-          <a:p>
-            <a:pPr algn="ctr"/>
-            <a:endParaRPr lang="en-KR"/>
-          </a:p>
-        </p:txBody>
-      </p:sp>
-      <p:pic>
-        <p:nvPicPr>
-          <p:cNvPr id="35" name="Picture 34">
-            <a:extLst>
-              <a:ext uri="{FF2B5EF4-FFF2-40B4-BE49-F238E27FC236}">
-                <a16:creationId xmlns:a16="http://schemas.microsoft.com/office/drawing/2014/main" id="{381E3D0C-385E-5500-D72D-F64CC1565869}"/>
-              </a:ext>
-            </a:extLst>
-          </p:cNvPr>
-          <p:cNvPicPr>
-            <a:picLocks noChangeAspect="1"/>
-          </p:cNvPicPr>
-          <p:nvPr/>
-        </p:nvPicPr>
-        <p:blipFill>
-          <a:blip r:embed="rId6"/>
-          <a:srcRect r="63618"/>
-          <a:stretch>
-            <a:fillRect/>
-          </a:stretch>
-        </p:blipFill>
-        <p:spPr>
-          <a:xfrm>
-            <a:off x="4248728" y="1538523"/>
-            <a:ext cx="2165666" cy="1528419"/>
-          </a:xfrm>
-          <a:prstGeom prst="rect">
-            <a:avLst/>
-          </a:prstGeom>
-        </p:spPr>
-      </p:pic>
-      <p:pic>
-        <p:nvPicPr>
-          <p:cNvPr id="36" name="Picture 35">
-            <a:extLst>
-              <a:ext uri="{FF2B5EF4-FFF2-40B4-BE49-F238E27FC236}">
-                <a16:creationId xmlns:a16="http://schemas.microsoft.com/office/drawing/2014/main" id="{17A603AB-6120-861C-E324-96BE54291FF7}"/>
-              </a:ext>
-            </a:extLst>
-          </p:cNvPr>
-          <p:cNvPicPr>
-            <a:picLocks noChangeAspect="1"/>
-          </p:cNvPicPr>
-          <p:nvPr/>
-        </p:nvPicPr>
-        <p:blipFill>
-          <a:blip r:embed="rId6"/>
-          <a:srcRect l="79902"/>
-          <a:stretch>
-            <a:fillRect/>
-          </a:stretch>
-        </p:blipFill>
-        <p:spPr>
-          <a:xfrm>
-            <a:off x="6414394" y="1543690"/>
-            <a:ext cx="1196357" cy="1528419"/>
-          </a:xfrm>
-          <a:prstGeom prst="rect">
-            <a:avLst/>
-          </a:prstGeom>
-        </p:spPr>
-      </p:pic>
-      <p:sp>
-        <p:nvSpPr>
-          <p:cNvPr id="37" name="Rectangle 36">
-            <a:extLst>
-              <a:ext uri="{FF2B5EF4-FFF2-40B4-BE49-F238E27FC236}">
-                <a16:creationId xmlns:a16="http://schemas.microsoft.com/office/drawing/2014/main" id="{F896AD01-D08A-931F-7F0A-31BAFF13ECAB}"/>
-              </a:ext>
-            </a:extLst>
-          </p:cNvPr>
-          <p:cNvSpPr/>
-          <p:nvPr/>
-        </p:nvSpPr>
-        <p:spPr>
-          <a:xfrm>
-            <a:off x="6414394" y="1543690"/>
-            <a:ext cx="616658" cy="1563178"/>
-          </a:xfrm>
-          <a:prstGeom prst="rect">
-            <a:avLst/>
-          </a:prstGeom>
-          <a:noFill/>
-          <a:ln w="28575" cap="flat" cmpd="sng" algn="ctr">
-            <a:solidFill>
-              <a:schemeClr val="accent2"/>
-            </a:solidFill>
-            <a:prstDash val="solid"/>
-            <a:round/>
-            <a:headEnd type="none" w="med" len="med"/>
-            <a:tailEnd type="none" w="med" len="med"/>
-          </a:ln>
-        </p:spPr>
-        <p:style>
-          <a:lnRef idx="0">
-            <a:scrgbClr r="0" g="0" b="0"/>
-          </a:lnRef>
-          <a:fillRef idx="0">
-            <a:scrgbClr r="0" g="0" b="0"/>
-          </a:fillRef>
-          <a:effectRef idx="0">
-            <a:scrgbClr r="0" g="0" b="0"/>
-          </a:effectRef>
-          <a:fontRef idx="minor">
-            <a:schemeClr val="accent6"/>
-          </a:fontRef>
-        </p:style>
-        <p:txBody>
-          <a:bodyPr rtlCol="0" anchor="ctr"/>
-          <a:lstStyle/>
-          <a:p>
-            <a:pPr algn="ctr"/>
-            <a:endParaRPr lang="en-KR"/>
-          </a:p>
-        </p:txBody>
-      </p:sp>
-      <p:sp>
-        <p:nvSpPr>
-          <p:cNvPr id="38" name="TextBox 37">
-            <a:extLst>
-              <a:ext uri="{FF2B5EF4-FFF2-40B4-BE49-F238E27FC236}">
-                <a16:creationId xmlns:a16="http://schemas.microsoft.com/office/drawing/2014/main" id="{18F8CE09-AA84-8D7A-8945-0E4D0DF84387}"/>
-              </a:ext>
-            </a:extLst>
-          </p:cNvPr>
-          <p:cNvSpPr txBox="1"/>
-          <p:nvPr/>
-        </p:nvSpPr>
-        <p:spPr>
-          <a:xfrm>
-            <a:off x="569893" y="1410835"/>
-            <a:ext cx="1224794" cy="261610"/>
-          </a:xfrm>
-          <a:prstGeom prst="rect">
-            <a:avLst/>
-          </a:prstGeom>
-          <a:noFill/>
-        </p:spPr>
-        <p:txBody>
-          <a:bodyPr wrap="square">
-            <a:spAutoFit/>
-          </a:bodyPr>
-          <a:lstStyle/>
-          <a:p>
-            <a:pPr marL="0" indent="0">
-              <a:buNone/>
-            </a:pPr>
-            <a:r>
-              <a:rPr lang="en-US" sz="1100" dirty="0">
-                <a:solidFill>
-                  <a:srgbClr val="2E7D32"/>
-                </a:solidFill>
-              </a:rPr>
-              <a:t>Baseline</a:t>
-            </a:r>
-            <a:endParaRPr lang="en-US" sz="1100" dirty="0"/>
-          </a:p>
-        </p:txBody>
-      </p:sp>
-      <p:sp>
-        <p:nvSpPr>
-          <p:cNvPr id="39" name="TextBox 38">
-            <a:extLst>
-              <a:ext uri="{FF2B5EF4-FFF2-40B4-BE49-F238E27FC236}">
-                <a16:creationId xmlns:a16="http://schemas.microsoft.com/office/drawing/2014/main" id="{B8FCAA6C-D9E6-38E2-F7B5-38D5892B6A29}"/>
-              </a:ext>
-            </a:extLst>
-          </p:cNvPr>
-          <p:cNvSpPr txBox="1"/>
-          <p:nvPr/>
-        </p:nvSpPr>
-        <p:spPr>
-          <a:xfrm>
-            <a:off x="4248728" y="1402469"/>
-            <a:ext cx="1093518" cy="261610"/>
-          </a:xfrm>
-          <a:prstGeom prst="rect">
-            <a:avLst/>
-          </a:prstGeom>
-          <a:noFill/>
-        </p:spPr>
-        <p:txBody>
-          <a:bodyPr wrap="square">
-            <a:spAutoFit/>
-          </a:bodyPr>
-          <a:lstStyle/>
-          <a:p>
-            <a:pPr marL="0" indent="0">
-              <a:buNone/>
-            </a:pPr>
-            <a:r>
-              <a:rPr lang="en-US" sz="1100" dirty="0">
-                <a:solidFill>
-                  <a:srgbClr val="2E7D32"/>
-                </a:solidFill>
-              </a:rPr>
-              <a:t>Speculative</a:t>
-            </a:r>
-            <a:endParaRPr lang="en-US" sz="1100" dirty="0"/>
-          </a:p>
-        </p:txBody>
-      </p:sp>
-      <p:sp>
-        <p:nvSpPr>
-          <p:cNvPr id="41" name="TextBox 40">
-            <a:extLst>
-              <a:ext uri="{FF2B5EF4-FFF2-40B4-BE49-F238E27FC236}">
-                <a16:creationId xmlns:a16="http://schemas.microsoft.com/office/drawing/2014/main" id="{C459988B-2160-0E64-C353-3CA6785DD281}"/>
-              </a:ext>
-            </a:extLst>
-          </p:cNvPr>
-          <p:cNvSpPr txBox="1"/>
-          <p:nvPr/>
-        </p:nvSpPr>
-        <p:spPr>
-          <a:xfrm>
-            <a:off x="640080" y="3250405"/>
-            <a:ext cx="2605588" cy="261610"/>
-          </a:xfrm>
-          <a:prstGeom prst="rect">
-            <a:avLst/>
-          </a:prstGeom>
-          <a:noFill/>
-        </p:spPr>
-        <p:txBody>
-          <a:bodyPr wrap="square">
-            <a:spAutoFit/>
-          </a:bodyPr>
-          <a:lstStyle/>
-          <a:p>
-            <a:r>
-              <a:rPr lang="en-US" sz="1100" b="1" dirty="0">
-                <a:solidFill>
-                  <a:srgbClr val="2E7D32"/>
-                </a:solidFill>
-              </a:rPr>
-              <a:t>Overall TTFT pattern across pairs</a:t>
-            </a:r>
-          </a:p>
-        </p:txBody>
-      </p:sp>
-      <p:sp>
-        <p:nvSpPr>
-          <p:cNvPr id="43" name="TextBox 42">
-            <a:extLst>
-              <a:ext uri="{FF2B5EF4-FFF2-40B4-BE49-F238E27FC236}">
-                <a16:creationId xmlns:a16="http://schemas.microsoft.com/office/drawing/2014/main" id="{DFA15E2D-C018-1039-F616-1757A89BE1AD}"/>
-              </a:ext>
-            </a:extLst>
-          </p:cNvPr>
-          <p:cNvSpPr txBox="1"/>
-          <p:nvPr/>
-        </p:nvSpPr>
-        <p:spPr>
-          <a:xfrm>
-            <a:off x="7888200" y="3356662"/>
-            <a:ext cx="1789111" cy="261610"/>
-          </a:xfrm>
-          <a:prstGeom prst="rect">
-            <a:avLst/>
-          </a:prstGeom>
-          <a:noFill/>
-        </p:spPr>
-        <p:txBody>
-          <a:bodyPr wrap="square">
-            <a:spAutoFit/>
-          </a:bodyPr>
-          <a:lstStyle/>
-          <a:p>
-            <a:r>
-              <a:rPr lang="en-US" sz="1100" b="1" dirty="0">
-                <a:solidFill>
-                  <a:srgbClr val="2E7D32"/>
-                </a:solidFill>
-              </a:rPr>
-              <a:t>Pair F task-level TTFT</a:t>
-            </a:r>
-          </a:p>
-        </p:txBody>
-      </p:sp>
-    </p:spTree>
   </p:cSld>
   <p:clrMapOvr>
     <a:masterClrMapping/>
